--- a/public/lessons/year-6-maths/autumn/week-8/solve-problems-involving-money-and-measures/teaching-powerpoint-v1.pptx
+++ b/public/lessons/year-6-maths/autumn/week-8/solve-problems-involving-money-and-measures/teaching-powerpoint-v1.pptx
@@ -2,24 +2,24 @@
 <file path=ppt/presentation.xml><?xml version="1.0" encoding="utf-8"?>
 <p:presentation xmlns:p="http://schemas.openxmlformats.org/presentationml/2006/main">
   <p:sldMasterIdLst>
-    <p:sldMasterId xmlns:r="http://schemas.openxmlformats.org/officeDocument/2006/relationships" id="2147483648" r:id="R9f328c096a11474e"/>
+    <p:sldMasterId xmlns:r="http://schemas.openxmlformats.org/officeDocument/2006/relationships" id="2147483648" r:id="R76fc2c92b3dd429b"/>
   </p:sldMasterIdLst>
   <p:notesMasterIdLst>
-    <p:notesMasterId xmlns:r="http://schemas.openxmlformats.org/officeDocument/2006/relationships" r:id="Raf03c249fd464786"/>
+    <p:notesMasterId xmlns:r="http://schemas.openxmlformats.org/officeDocument/2006/relationships" r:id="R61a14d8a6b47438f"/>
   </p:notesMasterIdLst>
   <p:sldIdLst>
-    <p:sldId xmlns:r="http://schemas.openxmlformats.org/officeDocument/2006/relationships" id="256" r:id="Rf36c732cf1554561"/>
-    <p:sldId xmlns:r="http://schemas.openxmlformats.org/officeDocument/2006/relationships" id="257" r:id="Rd5fc7df67d7643fe"/>
-    <p:sldId xmlns:r="http://schemas.openxmlformats.org/officeDocument/2006/relationships" id="258" r:id="R2e2b12d2fbec4b26"/>
-    <p:sldId xmlns:r="http://schemas.openxmlformats.org/officeDocument/2006/relationships" id="259" r:id="R5d403bdd8c814e96"/>
-    <p:sldId xmlns:r="http://schemas.openxmlformats.org/officeDocument/2006/relationships" id="260" r:id="Rec2a6f1269c74e46"/>
-    <p:sldId xmlns:r="http://schemas.openxmlformats.org/officeDocument/2006/relationships" id="261" r:id="R9d37397597dd4d6f"/>
-    <p:sldId xmlns:r="http://schemas.openxmlformats.org/officeDocument/2006/relationships" id="262" r:id="Rd57a8341e7a948f9"/>
-    <p:sldId xmlns:r="http://schemas.openxmlformats.org/officeDocument/2006/relationships" id="263" r:id="Ra67545845a904900"/>
-    <p:sldId xmlns:r="http://schemas.openxmlformats.org/officeDocument/2006/relationships" id="264" r:id="R59ac7c1167dd4e78"/>
-    <p:sldId xmlns:r="http://schemas.openxmlformats.org/officeDocument/2006/relationships" id="265" r:id="Rc73e2f3894244062"/>
-    <p:sldId xmlns:r="http://schemas.openxmlformats.org/officeDocument/2006/relationships" id="266" r:id="Rccaabbdb9013434f"/>
-    <p:sldId xmlns:r="http://schemas.openxmlformats.org/officeDocument/2006/relationships" id="267" r:id="R2d0d09f50f8245b6"/>
+    <p:sldId xmlns:r="http://schemas.openxmlformats.org/officeDocument/2006/relationships" id="256" r:id="Rf0af6bb48337408e"/>
+    <p:sldId xmlns:r="http://schemas.openxmlformats.org/officeDocument/2006/relationships" id="257" r:id="R9a88950c70bc45b8"/>
+    <p:sldId xmlns:r="http://schemas.openxmlformats.org/officeDocument/2006/relationships" id="258" r:id="R85c7159bd3a644f1"/>
+    <p:sldId xmlns:r="http://schemas.openxmlformats.org/officeDocument/2006/relationships" id="259" r:id="Rbaa2e5b041be4023"/>
+    <p:sldId xmlns:r="http://schemas.openxmlformats.org/officeDocument/2006/relationships" id="260" r:id="R1279c5b925484ea1"/>
+    <p:sldId xmlns:r="http://schemas.openxmlformats.org/officeDocument/2006/relationships" id="261" r:id="R2f39b935f0c04e9f"/>
+    <p:sldId xmlns:r="http://schemas.openxmlformats.org/officeDocument/2006/relationships" id="262" r:id="R406d1f96c1be4c58"/>
+    <p:sldId xmlns:r="http://schemas.openxmlformats.org/officeDocument/2006/relationships" id="263" r:id="R2bad32e8d2d94d19"/>
+    <p:sldId xmlns:r="http://schemas.openxmlformats.org/officeDocument/2006/relationships" id="264" r:id="R4a68e6f2efee4b67"/>
+    <p:sldId xmlns:r="http://schemas.openxmlformats.org/officeDocument/2006/relationships" id="265" r:id="R14b3d0c603bf4178"/>
+    <p:sldId xmlns:r="http://schemas.openxmlformats.org/officeDocument/2006/relationships" id="266" r:id="R62b62c75055143a1"/>
+    <p:sldId xmlns:r="http://schemas.openxmlformats.org/officeDocument/2006/relationships" id="267" r:id="R12f6f433c6504e6b"/>
   </p:sldIdLst>
   <p:sldSz cx="12192000" cy="6858000"/>
   <p:notesSz cx="6858000" cy="9144000"/>
@@ -873,7 +873,7 @@
           <a:lstStyle xmlns:a="http://schemas.openxmlformats.org/drawingml/2006/main"/>
           <a:p xmlns:a="http://schemas.openxmlformats.org/drawingml/2006/main">
             <a:r>
-              <a:t>I do. Reveal the question, setup and each calculation stage one click at a time. Pupils watch before copying. Model answer: £1,132.</a:t>
+              <a:t>I do. Reveal the question, then reveal each mathematical change one click at a time. Point to the numbers and operation that changed before moving to the next line. Final answer: £1,132.</a:t>
             </a:r>
           </a:p>
         </p:txBody>
@@ -1291,7 +1291,7 @@
   </p:cSld>
   <p:clrMap bg1="lt1" tx1="dk1" bg2="lt2" tx2="dk2" accent1="accent1" accent2="accent2" accent3="accent3" accent4="accent4" accent5="accent5" accent6="accent6" hlink="hlink" folHlink="folHlink"/>
   <p:sldLayoutIdLst>
-    <p:sldLayoutId xmlns:r="http://schemas.openxmlformats.org/officeDocument/2006/relationships" id="2147483649" r:id="Rd2307d875aee487d"/>
+    <p:sldLayoutId xmlns:r="http://schemas.openxmlformats.org/officeDocument/2006/relationships" id="2147483649" r:id="Rd53bb97a52c1462e"/>
   </p:sldLayoutIdLst>
   <p:txStyles>
     <p:titleStyle>
@@ -1842,7 +1842,7 @@
           <p:cNvPr id="12" name="">
             <a:extLst xmlns:a="http://schemas.openxmlformats.org/drawingml/2006/main">
               <a:ext uri="{FF2B5EF4-FFF2-40B4-BE49-F238E27FC236}">
-                <a16:creationId xmlns:a16="http://schemas.microsoft.com/office/drawing/2014/main" id="{20C5DD6D-17E0-48C9-B1DD-A81E11BF2C54}"/>
+                <a16:creationId xmlns:a16="http://schemas.microsoft.com/office/drawing/2014/main" id="{6CAF08AB-C4F0-4979-80CE-C0573388DC24}"/>
               </a:ext>
             </a:extLst>
           </p:cNvPr>
@@ -1874,7 +1874,7 @@
           <p:cNvPr id="2" name="">
             <a:extLst xmlns:a="http://schemas.openxmlformats.org/drawingml/2006/main">
               <a:ext uri="{FF2B5EF4-FFF2-40B4-BE49-F238E27FC236}">
-                <a16:creationId xmlns:a16="http://schemas.microsoft.com/office/drawing/2014/main" id="{E601DB5F-6FE2-424C-BC49-D4139F07D695}"/>
+                <a16:creationId xmlns:a16="http://schemas.microsoft.com/office/drawing/2014/main" id="{BE5426EE-FE75-4BE8-AC3C-048F9506D082}"/>
               </a:ext>
             </a:extLst>
           </p:cNvPr>
@@ -1931,7 +1931,7 @@
           <p:cNvPr id="3" name="">
             <a:extLst xmlns:a="http://schemas.openxmlformats.org/drawingml/2006/main">
               <a:ext uri="{FF2B5EF4-FFF2-40B4-BE49-F238E27FC236}">
-                <a16:creationId xmlns:a16="http://schemas.microsoft.com/office/drawing/2014/main" id="{A6779428-7C08-4BC6-8904-A6E97055B342}"/>
+                <a16:creationId xmlns:a16="http://schemas.microsoft.com/office/drawing/2014/main" id="{A072CDE3-6298-40E5-99F0-4678F49D8AED}"/>
               </a:ext>
             </a:extLst>
           </p:cNvPr>
@@ -1965,7 +1965,7 @@
           <p:cNvPr id="4" name="">
             <a:extLst xmlns:a="http://schemas.openxmlformats.org/drawingml/2006/main">
               <a:ext uri="{FF2B5EF4-FFF2-40B4-BE49-F238E27FC236}">
-                <a16:creationId xmlns:a16="http://schemas.microsoft.com/office/drawing/2014/main" id="{7B753C34-4341-4EE5-9B75-D0860442FF36}"/>
+                <a16:creationId xmlns:a16="http://schemas.microsoft.com/office/drawing/2014/main" id="{D9F3CC1B-8553-437D-9D98-3207AE0D4BEF}"/>
               </a:ext>
             </a:extLst>
           </p:cNvPr>
@@ -2022,7 +2022,7 @@
           <p:cNvPr id="5" name="">
             <a:extLst xmlns:a="http://schemas.openxmlformats.org/drawingml/2006/main">
               <a:ext uri="{FF2B5EF4-FFF2-40B4-BE49-F238E27FC236}">
-                <a16:creationId xmlns:a16="http://schemas.microsoft.com/office/drawing/2014/main" id="{60941645-7B14-4234-B127-656A9D440F5B}"/>
+                <a16:creationId xmlns:a16="http://schemas.microsoft.com/office/drawing/2014/main" id="{D5D7CC05-65E7-464D-AB2F-E8D9183484E7}"/>
               </a:ext>
             </a:extLst>
           </p:cNvPr>
@@ -2079,7 +2079,7 @@
           <p:cNvPr id="6" name="">
             <a:extLst xmlns:a="http://schemas.openxmlformats.org/drawingml/2006/main">
               <a:ext uri="{FF2B5EF4-FFF2-40B4-BE49-F238E27FC236}">
-                <a16:creationId xmlns:a16="http://schemas.microsoft.com/office/drawing/2014/main" id="{318268B1-9443-430D-B220-4526C9B18666}"/>
+                <a16:creationId xmlns:a16="http://schemas.microsoft.com/office/drawing/2014/main" id="{9886B973-18CD-457F-B1AC-831D31475081}"/>
               </a:ext>
             </a:extLst>
           </p:cNvPr>
@@ -2113,7 +2113,7 @@
           <p:cNvPr id="7" name="">
             <a:extLst xmlns:a="http://schemas.openxmlformats.org/drawingml/2006/main">
               <a:ext uri="{FF2B5EF4-FFF2-40B4-BE49-F238E27FC236}">
-                <a16:creationId xmlns:a16="http://schemas.microsoft.com/office/drawing/2014/main" id="{A0026A03-ED4A-4696-B2ED-679AB3D12F89}"/>
+                <a16:creationId xmlns:a16="http://schemas.microsoft.com/office/drawing/2014/main" id="{D0EF5F8C-57A4-4667-8AAD-229A6D1CE61A}"/>
               </a:ext>
             </a:extLst>
           </p:cNvPr>
@@ -2170,7 +2170,7 @@
           <p:cNvPr id="8" name="">
             <a:extLst xmlns:a="http://schemas.openxmlformats.org/drawingml/2006/main">
               <a:ext uri="{FF2B5EF4-FFF2-40B4-BE49-F238E27FC236}">
-                <a16:creationId xmlns:a16="http://schemas.microsoft.com/office/drawing/2014/main" id="{3096D955-1B51-4B45-9482-B83D445EBBB0}"/>
+                <a16:creationId xmlns:a16="http://schemas.microsoft.com/office/drawing/2014/main" id="{1E51A3D3-454E-48F9-A7A4-A6146E93B1A8}"/>
               </a:ext>
             </a:extLst>
           </p:cNvPr>
@@ -2227,7 +2227,7 @@
           <p:cNvPr id="9" name="">
             <a:extLst xmlns:a="http://schemas.openxmlformats.org/drawingml/2006/main">
               <a:ext uri="{FF2B5EF4-FFF2-40B4-BE49-F238E27FC236}">
-                <a16:creationId xmlns:a16="http://schemas.microsoft.com/office/drawing/2014/main" id="{1A54D7FF-E8A8-49F8-B709-5EAEFCB1C29C}"/>
+                <a16:creationId xmlns:a16="http://schemas.microsoft.com/office/drawing/2014/main" id="{792205D2-BA9E-4379-8350-0BA79C9BA331}"/>
               </a:ext>
             </a:extLst>
           </p:cNvPr>
@@ -2284,7 +2284,7 @@
           <p:cNvPr id="10" name="">
             <a:extLst xmlns:a="http://schemas.openxmlformats.org/drawingml/2006/main">
               <a:ext uri="{FF2B5EF4-FFF2-40B4-BE49-F238E27FC236}">
-                <a16:creationId xmlns:a16="http://schemas.microsoft.com/office/drawing/2014/main" id="{920BA127-F46D-40C9-98FE-1ECB939B2B6B}"/>
+                <a16:creationId xmlns:a16="http://schemas.microsoft.com/office/drawing/2014/main" id="{41B9592C-C953-4A6E-9976-37D79869D233}"/>
               </a:ext>
             </a:extLst>
           </p:cNvPr>
@@ -2341,7 +2341,7 @@
           <p:cNvPr id="11" name="">
             <a:extLst xmlns:a="http://schemas.openxmlformats.org/drawingml/2006/main">
               <a:ext uri="{FF2B5EF4-FFF2-40B4-BE49-F238E27FC236}">
-                <a16:creationId xmlns:a16="http://schemas.microsoft.com/office/drawing/2014/main" id="{2FC2AF6A-9546-41D0-8970-D77E402D49F0}"/>
+                <a16:creationId xmlns:a16="http://schemas.microsoft.com/office/drawing/2014/main" id="{D68122A6-9F4F-479D-9EFD-B78D1000B9DB}"/>
               </a:ext>
             </a:extLst>
           </p:cNvPr>
@@ -2396,7 +2396,7 @@
     </p:spTree>
     <p:extLst>
       <p:ext uri="{BB962C8B-B14F-4D97-AF65-F5344CB8AC3E}">
-        <p14:creationId xmlns:p14="http://schemas.microsoft.com/office/powerpoint/2010/main" val="1317918497"/>
+        <p14:creationId xmlns:p14="http://schemas.microsoft.com/office/powerpoint/2010/main" val="281100459"/>
       </p:ext>
     </p:extLst>
   </p:cSld>
@@ -2427,7 +2427,7 @@
           <p:cNvPr id="14" name="">
             <a:extLst xmlns:a="http://schemas.openxmlformats.org/drawingml/2006/main">
               <a:ext uri="{FF2B5EF4-FFF2-40B4-BE49-F238E27FC236}">
-                <a16:creationId xmlns:a16="http://schemas.microsoft.com/office/drawing/2014/main" id="{73A957C2-6256-4F31-96A2-44584E61AEA4}"/>
+                <a16:creationId xmlns:a16="http://schemas.microsoft.com/office/drawing/2014/main" id="{E12B66DA-5D52-41B7-87B5-9BEDED695D70}"/>
               </a:ext>
             </a:extLst>
           </p:cNvPr>
@@ -2459,7 +2459,7 @@
           <p:cNvPr id="2" name="">
             <a:extLst xmlns:a="http://schemas.openxmlformats.org/drawingml/2006/main">
               <a:ext uri="{FF2B5EF4-FFF2-40B4-BE49-F238E27FC236}">
-                <a16:creationId xmlns:a16="http://schemas.microsoft.com/office/drawing/2014/main" id="{F9101BA6-0CC0-45A3-8062-CFB56C08DAC1}"/>
+                <a16:creationId xmlns:a16="http://schemas.microsoft.com/office/drawing/2014/main" id="{0D2C94EE-E93E-40E3-B59F-5346785513C2}"/>
               </a:ext>
             </a:extLst>
           </p:cNvPr>
@@ -2516,7 +2516,7 @@
           <p:cNvPr id="3" name="">
             <a:extLst xmlns:a="http://schemas.openxmlformats.org/drawingml/2006/main">
               <a:ext uri="{FF2B5EF4-FFF2-40B4-BE49-F238E27FC236}">
-                <a16:creationId xmlns:a16="http://schemas.microsoft.com/office/drawing/2014/main" id="{747B0247-CEAF-41F7-B40B-F74D7C9100C4}"/>
+                <a16:creationId xmlns:a16="http://schemas.microsoft.com/office/drawing/2014/main" id="{9D961BAD-514B-4DD2-AC4A-8BF5F6E21B73}"/>
               </a:ext>
             </a:extLst>
           </p:cNvPr>
@@ -2548,7 +2548,7 @@
           <p:cNvPr id="4" name="">
             <a:extLst xmlns:a="http://schemas.openxmlformats.org/drawingml/2006/main">
               <a:ext uri="{FF2B5EF4-FFF2-40B4-BE49-F238E27FC236}">
-                <a16:creationId xmlns:a16="http://schemas.microsoft.com/office/drawing/2014/main" id="{DC0A2CB6-87A5-4CD7-BE93-0B13DCBF6053}"/>
+                <a16:creationId xmlns:a16="http://schemas.microsoft.com/office/drawing/2014/main" id="{349A3FF0-C5A1-4CB6-BBE2-8CF229D7D05D}"/>
               </a:ext>
             </a:extLst>
           </p:cNvPr>
@@ -2605,7 +2605,7 @@
           <p:cNvPr id="5" name="">
             <a:extLst xmlns:a="http://schemas.openxmlformats.org/drawingml/2006/main">
               <a:ext uri="{FF2B5EF4-FFF2-40B4-BE49-F238E27FC236}">
-                <a16:creationId xmlns:a16="http://schemas.microsoft.com/office/drawing/2014/main" id="{C69A64F0-316C-4CEE-B79B-F7411FE4B4E4}"/>
+                <a16:creationId xmlns:a16="http://schemas.microsoft.com/office/drawing/2014/main" id="{82569896-1B74-4825-810C-710E2114FE40}"/>
               </a:ext>
             </a:extLst>
           </p:cNvPr>
@@ -2662,7 +2662,7 @@
           <p:cNvPr id="6" name="">
             <a:extLst xmlns:a="http://schemas.openxmlformats.org/drawingml/2006/main">
               <a:ext uri="{FF2B5EF4-FFF2-40B4-BE49-F238E27FC236}">
-                <a16:creationId xmlns:a16="http://schemas.microsoft.com/office/drawing/2014/main" id="{4E08EB42-C862-4790-93FB-50FA5F545081}"/>
+                <a16:creationId xmlns:a16="http://schemas.microsoft.com/office/drawing/2014/main" id="{3A7AAF5E-CE42-41A1-AEFC-C0F6B01943EF}"/>
               </a:ext>
             </a:extLst>
           </p:cNvPr>
@@ -2719,7 +2719,7 @@
           <p:cNvPr id="7" name="">
             <a:extLst xmlns:a="http://schemas.openxmlformats.org/drawingml/2006/main">
               <a:ext uri="{FF2B5EF4-FFF2-40B4-BE49-F238E27FC236}">
-                <a16:creationId xmlns:a16="http://schemas.microsoft.com/office/drawing/2014/main" id="{74377392-3209-4AC7-B4ED-62E096AFE20E}"/>
+                <a16:creationId xmlns:a16="http://schemas.microsoft.com/office/drawing/2014/main" id="{ABACF581-CC48-43EF-879D-35083B08DFCA}"/>
               </a:ext>
             </a:extLst>
           </p:cNvPr>
@@ -2751,7 +2751,7 @@
           <p:cNvPr id="8" name="">
             <a:extLst xmlns:a="http://schemas.openxmlformats.org/drawingml/2006/main">
               <a:ext uri="{FF2B5EF4-FFF2-40B4-BE49-F238E27FC236}">
-                <a16:creationId xmlns:a16="http://schemas.microsoft.com/office/drawing/2014/main" id="{F8BA07C6-0E52-42FC-9FC7-C488C8D6B3B4}"/>
+                <a16:creationId xmlns:a16="http://schemas.microsoft.com/office/drawing/2014/main" id="{71CA46F2-A83C-410A-AED5-84CB88A9D2EC}"/>
               </a:ext>
             </a:extLst>
           </p:cNvPr>
@@ -2808,7 +2808,7 @@
           <p:cNvPr id="9" name="">
             <a:extLst xmlns:a="http://schemas.openxmlformats.org/drawingml/2006/main">
               <a:ext uri="{FF2B5EF4-FFF2-40B4-BE49-F238E27FC236}">
-                <a16:creationId xmlns:a16="http://schemas.microsoft.com/office/drawing/2014/main" id="{79DA62CA-BACE-432E-A1E3-0AA0FD406D80}"/>
+                <a16:creationId xmlns:a16="http://schemas.microsoft.com/office/drawing/2014/main" id="{A1181A4B-7BB7-49DD-B6A5-68FC595CAE7F}"/>
               </a:ext>
             </a:extLst>
           </p:cNvPr>
@@ -2865,7 +2865,7 @@
           <p:cNvPr id="10" name="">
             <a:extLst xmlns:a="http://schemas.openxmlformats.org/drawingml/2006/main">
               <a:ext uri="{FF2B5EF4-FFF2-40B4-BE49-F238E27FC236}">
-                <a16:creationId xmlns:a16="http://schemas.microsoft.com/office/drawing/2014/main" id="{C613C4C7-E7E7-4DA9-9E1E-2450ED93A0F3}"/>
+                <a16:creationId xmlns:a16="http://schemas.microsoft.com/office/drawing/2014/main" id="{301D1020-87EC-4944-940E-037ADDC6DDE0}"/>
               </a:ext>
             </a:extLst>
           </p:cNvPr>
@@ -2922,7 +2922,7 @@
           <p:cNvPr id="11" name="">
             <a:extLst xmlns:a="http://schemas.openxmlformats.org/drawingml/2006/main">
               <a:ext uri="{FF2B5EF4-FFF2-40B4-BE49-F238E27FC236}">
-                <a16:creationId xmlns:a16="http://schemas.microsoft.com/office/drawing/2014/main" id="{1CE53D35-41E8-41E4-94F0-4F40FACCCCD5}"/>
+                <a16:creationId xmlns:a16="http://schemas.microsoft.com/office/drawing/2014/main" id="{D795E53D-14DE-43F9-93AA-C2FFAC015BC8}"/>
               </a:ext>
             </a:extLst>
           </p:cNvPr>
@@ -2979,7 +2979,7 @@
           <p:cNvPr id="12" name="">
             <a:extLst xmlns:a="http://schemas.openxmlformats.org/drawingml/2006/main">
               <a:ext uri="{FF2B5EF4-FFF2-40B4-BE49-F238E27FC236}">
-                <a16:creationId xmlns:a16="http://schemas.microsoft.com/office/drawing/2014/main" id="{2680C458-B08D-437C-9383-FE27307B8ACA}"/>
+                <a16:creationId xmlns:a16="http://schemas.microsoft.com/office/drawing/2014/main" id="{BE52833D-55F1-4A78-8F95-BAFC579C2FF3}"/>
               </a:ext>
             </a:extLst>
           </p:cNvPr>
@@ -3036,7 +3036,7 @@
           <p:cNvPr id="13" name="">
             <a:extLst xmlns:a="http://schemas.openxmlformats.org/drawingml/2006/main">
               <a:ext uri="{FF2B5EF4-FFF2-40B4-BE49-F238E27FC236}">
-                <a16:creationId xmlns:a16="http://schemas.microsoft.com/office/drawing/2014/main" id="{CEF3A212-08CC-4911-A838-B6AC33DA7979}"/>
+                <a16:creationId xmlns:a16="http://schemas.microsoft.com/office/drawing/2014/main" id="{CF7A7AFC-DDC3-4882-AC21-D7A4C6A6DD46}"/>
               </a:ext>
             </a:extLst>
           </p:cNvPr>
@@ -3091,7 +3091,7 @@
     </p:spTree>
     <p:extLst>
       <p:ext uri="{BB962C8B-B14F-4D97-AF65-F5344CB8AC3E}">
-        <p14:creationId xmlns:p14="http://schemas.microsoft.com/office/powerpoint/2010/main" val="1357921119"/>
+        <p14:creationId xmlns:p14="http://schemas.microsoft.com/office/powerpoint/2010/main" val="538494821"/>
       </p:ext>
     </p:extLst>
   </p:cSld>
@@ -3292,7 +3292,7 @@
           <p:cNvPr id="19" name="">
             <a:extLst xmlns:a="http://schemas.openxmlformats.org/drawingml/2006/main">
               <a:ext uri="{FF2B5EF4-FFF2-40B4-BE49-F238E27FC236}">
-                <a16:creationId xmlns:a16="http://schemas.microsoft.com/office/drawing/2014/main" id="{1F866BCE-B0DB-4A29-8A50-552DB93FA2FA}"/>
+                <a16:creationId xmlns:a16="http://schemas.microsoft.com/office/drawing/2014/main" id="{B1D310BF-AE05-4C05-BB2A-E92E7B2261D1}"/>
               </a:ext>
             </a:extLst>
           </p:cNvPr>
@@ -3324,7 +3324,7 @@
           <p:cNvPr id="2" name="">
             <a:extLst xmlns:a="http://schemas.openxmlformats.org/drawingml/2006/main">
               <a:ext uri="{FF2B5EF4-FFF2-40B4-BE49-F238E27FC236}">
-                <a16:creationId xmlns:a16="http://schemas.microsoft.com/office/drawing/2014/main" id="{DCD6010D-B4B7-4067-B657-CF1F53297019}"/>
+                <a16:creationId xmlns:a16="http://schemas.microsoft.com/office/drawing/2014/main" id="{E75F40FB-E44A-4D67-B1D4-C8D384B440DC}"/>
               </a:ext>
             </a:extLst>
           </p:cNvPr>
@@ -3381,7 +3381,7 @@
           <p:cNvPr id="3" name="">
             <a:extLst xmlns:a="http://schemas.openxmlformats.org/drawingml/2006/main">
               <a:ext uri="{FF2B5EF4-FFF2-40B4-BE49-F238E27FC236}">
-                <a16:creationId xmlns:a16="http://schemas.microsoft.com/office/drawing/2014/main" id="{A0E5F753-AA89-4EC1-9645-3220F141A5FC}"/>
+                <a16:creationId xmlns:a16="http://schemas.microsoft.com/office/drawing/2014/main" id="{35843BB6-D7F1-434A-A428-9672575117C7}"/>
               </a:ext>
             </a:extLst>
           </p:cNvPr>
@@ -3413,7 +3413,7 @@
           <p:cNvPr id="4" name="">
             <a:extLst xmlns:a="http://schemas.openxmlformats.org/drawingml/2006/main">
               <a:ext uri="{FF2B5EF4-FFF2-40B4-BE49-F238E27FC236}">
-                <a16:creationId xmlns:a16="http://schemas.microsoft.com/office/drawing/2014/main" id="{59261568-3720-459F-B898-B88501ECE3EC}"/>
+                <a16:creationId xmlns:a16="http://schemas.microsoft.com/office/drawing/2014/main" id="{AB23F38E-3873-4626-8E4C-F495000012BE}"/>
               </a:ext>
             </a:extLst>
           </p:cNvPr>
@@ -3470,7 +3470,7 @@
           <p:cNvPr id="5" name="">
             <a:extLst xmlns:a="http://schemas.openxmlformats.org/drawingml/2006/main">
               <a:ext uri="{FF2B5EF4-FFF2-40B4-BE49-F238E27FC236}">
-                <a16:creationId xmlns:a16="http://schemas.microsoft.com/office/drawing/2014/main" id="{0E219149-10BB-44CE-B2F8-EBD929C799B2}"/>
+                <a16:creationId xmlns:a16="http://schemas.microsoft.com/office/drawing/2014/main" id="{FF803DA2-F78E-4364-BF7B-49D502CD7A5D}"/>
               </a:ext>
             </a:extLst>
           </p:cNvPr>
@@ -3527,7 +3527,7 @@
           <p:cNvPr id="6" name="">
             <a:extLst xmlns:a="http://schemas.openxmlformats.org/drawingml/2006/main">
               <a:ext uri="{FF2B5EF4-FFF2-40B4-BE49-F238E27FC236}">
-                <a16:creationId xmlns:a16="http://schemas.microsoft.com/office/drawing/2014/main" id="{1248D8D7-369A-43B5-8968-BF9A8B1B387F}"/>
+                <a16:creationId xmlns:a16="http://schemas.microsoft.com/office/drawing/2014/main" id="{78CD2A18-BD63-4B2E-AF83-04C49067F3AB}"/>
               </a:ext>
             </a:extLst>
           </p:cNvPr>
@@ -3584,7 +3584,7 @@
           <p:cNvPr id="7" name="">
             <a:extLst xmlns:a="http://schemas.openxmlformats.org/drawingml/2006/main">
               <a:ext uri="{FF2B5EF4-FFF2-40B4-BE49-F238E27FC236}">
-                <a16:creationId xmlns:a16="http://schemas.microsoft.com/office/drawing/2014/main" id="{C82B670D-0208-4418-9652-0B351AAC9CA9}"/>
+                <a16:creationId xmlns:a16="http://schemas.microsoft.com/office/drawing/2014/main" id="{8D59ED54-6251-4336-ABF6-8D42462D9C6A}"/>
               </a:ext>
             </a:extLst>
           </p:cNvPr>
@@ -3616,7 +3616,7 @@
           <p:cNvPr id="8" name="">
             <a:extLst xmlns:a="http://schemas.openxmlformats.org/drawingml/2006/main">
               <a:ext uri="{FF2B5EF4-FFF2-40B4-BE49-F238E27FC236}">
-                <a16:creationId xmlns:a16="http://schemas.microsoft.com/office/drawing/2014/main" id="{AA23481D-638C-463B-BD9C-55355790163A}"/>
+                <a16:creationId xmlns:a16="http://schemas.microsoft.com/office/drawing/2014/main" id="{5877507F-3749-487B-8154-7ADEB7324CB3}"/>
               </a:ext>
             </a:extLst>
           </p:cNvPr>
@@ -3673,7 +3673,7 @@
           <p:cNvPr id="9" name="">
             <a:extLst xmlns:a="http://schemas.openxmlformats.org/drawingml/2006/main">
               <a:ext uri="{FF2B5EF4-FFF2-40B4-BE49-F238E27FC236}">
-                <a16:creationId xmlns:a16="http://schemas.microsoft.com/office/drawing/2014/main" id="{94EC46EC-9E81-424D-B308-16534581597D}"/>
+                <a16:creationId xmlns:a16="http://schemas.microsoft.com/office/drawing/2014/main" id="{0F1A153D-59AB-4829-9261-25D1A9297A73}"/>
               </a:ext>
             </a:extLst>
           </p:cNvPr>
@@ -3730,7 +3730,7 @@
           <p:cNvPr id="10" name="">
             <a:extLst xmlns:a="http://schemas.openxmlformats.org/drawingml/2006/main">
               <a:ext uri="{FF2B5EF4-FFF2-40B4-BE49-F238E27FC236}">
-                <a16:creationId xmlns:a16="http://schemas.microsoft.com/office/drawing/2014/main" id="{B2FBBFA6-483F-4DFC-895B-E59D29121B63}"/>
+                <a16:creationId xmlns:a16="http://schemas.microsoft.com/office/drawing/2014/main" id="{770FA7FB-F928-4094-AC30-D7C742DD5149}"/>
               </a:ext>
             </a:extLst>
           </p:cNvPr>
@@ -3787,7 +3787,7 @@
           <p:cNvPr id="11" name="">
             <a:extLst xmlns:a="http://schemas.openxmlformats.org/drawingml/2006/main">
               <a:ext uri="{FF2B5EF4-FFF2-40B4-BE49-F238E27FC236}">
-                <a16:creationId xmlns:a16="http://schemas.microsoft.com/office/drawing/2014/main" id="{CF0497BC-AFD1-4332-B0E1-338CBC59FA1B}"/>
+                <a16:creationId xmlns:a16="http://schemas.microsoft.com/office/drawing/2014/main" id="{3F3B1D2E-CACF-441A-AB96-74CB3F24DDA6}"/>
               </a:ext>
             </a:extLst>
           </p:cNvPr>
@@ -3821,7 +3821,7 @@
           <p:cNvPr id="12" name="">
             <a:extLst xmlns:a="http://schemas.openxmlformats.org/drawingml/2006/main">
               <a:ext uri="{FF2B5EF4-FFF2-40B4-BE49-F238E27FC236}">
-                <a16:creationId xmlns:a16="http://schemas.microsoft.com/office/drawing/2014/main" id="{748A8E80-B0E2-4D1E-B953-77B0F4746EB4}"/>
+                <a16:creationId xmlns:a16="http://schemas.microsoft.com/office/drawing/2014/main" id="{3A17A2BE-2831-4295-8393-EABEC813512D}"/>
               </a:ext>
             </a:extLst>
           </p:cNvPr>
@@ -3878,7 +3878,7 @@
           <p:cNvPr id="13" name="">
             <a:extLst xmlns:a="http://schemas.openxmlformats.org/drawingml/2006/main">
               <a:ext uri="{FF2B5EF4-FFF2-40B4-BE49-F238E27FC236}">
-                <a16:creationId xmlns:a16="http://schemas.microsoft.com/office/drawing/2014/main" id="{11EC358A-43B2-41F3-8FB0-3A001016A2F2}"/>
+                <a16:creationId xmlns:a16="http://schemas.microsoft.com/office/drawing/2014/main" id="{60A5F480-E50E-43ED-8F9F-9C6A2E746BD7}"/>
               </a:ext>
             </a:extLst>
           </p:cNvPr>
@@ -3935,7 +3935,7 @@
           <p:cNvPr id="14" name="">
             <a:extLst xmlns:a="http://schemas.openxmlformats.org/drawingml/2006/main">
               <a:ext uri="{FF2B5EF4-FFF2-40B4-BE49-F238E27FC236}">
-                <a16:creationId xmlns:a16="http://schemas.microsoft.com/office/drawing/2014/main" id="{17DA6140-CC5C-49DB-A426-8ECCE3EC9F70}"/>
+                <a16:creationId xmlns:a16="http://schemas.microsoft.com/office/drawing/2014/main" id="{D8FD4A4A-E171-4B8D-9FE4-9AEAE01BB7A2}"/>
               </a:ext>
             </a:extLst>
           </p:cNvPr>
@@ -3992,7 +3992,7 @@
           <p:cNvPr id="15" name="">
             <a:extLst xmlns:a="http://schemas.openxmlformats.org/drawingml/2006/main">
               <a:ext uri="{FF2B5EF4-FFF2-40B4-BE49-F238E27FC236}">
-                <a16:creationId xmlns:a16="http://schemas.microsoft.com/office/drawing/2014/main" id="{3E41BEFE-C64F-4F1E-86A6-312126A994AE}"/>
+                <a16:creationId xmlns:a16="http://schemas.microsoft.com/office/drawing/2014/main" id="{33B911AC-F3EF-48D0-94A4-499AD80ADC5B}"/>
               </a:ext>
             </a:extLst>
           </p:cNvPr>
@@ -4026,7 +4026,7 @@
           <p:cNvPr id="16" name="">
             <a:extLst xmlns:a="http://schemas.openxmlformats.org/drawingml/2006/main">
               <a:ext uri="{FF2B5EF4-FFF2-40B4-BE49-F238E27FC236}">
-                <a16:creationId xmlns:a16="http://schemas.microsoft.com/office/drawing/2014/main" id="{557B0571-0714-4522-90A0-FC0261C379EB}"/>
+                <a16:creationId xmlns:a16="http://schemas.microsoft.com/office/drawing/2014/main" id="{BF1B4613-345E-49A0-BA3F-CA4D1E341042}"/>
               </a:ext>
             </a:extLst>
           </p:cNvPr>
@@ -4083,7 +4083,7 @@
           <p:cNvPr id="17" name="">
             <a:extLst xmlns:a="http://schemas.openxmlformats.org/drawingml/2006/main">
               <a:ext uri="{FF2B5EF4-FFF2-40B4-BE49-F238E27FC236}">
-                <a16:creationId xmlns:a16="http://schemas.microsoft.com/office/drawing/2014/main" id="{226F409B-1C3B-4379-9ADF-076BDCE1434B}"/>
+                <a16:creationId xmlns:a16="http://schemas.microsoft.com/office/drawing/2014/main" id="{CAC3F13A-448F-48D0-BD91-7DBE8F84039D}"/>
               </a:ext>
             </a:extLst>
           </p:cNvPr>
@@ -4140,7 +4140,7 @@
           <p:cNvPr id="18" name="">
             <a:extLst xmlns:a="http://schemas.openxmlformats.org/drawingml/2006/main">
               <a:ext uri="{FF2B5EF4-FFF2-40B4-BE49-F238E27FC236}">
-                <a16:creationId xmlns:a16="http://schemas.microsoft.com/office/drawing/2014/main" id="{34FD2ECA-87D1-484A-82F6-B100F7AB5017}"/>
+                <a16:creationId xmlns:a16="http://schemas.microsoft.com/office/drawing/2014/main" id="{135FDFE7-5DC5-48E1-A785-669524B1E8FD}"/>
               </a:ext>
             </a:extLst>
           </p:cNvPr>
@@ -4195,7 +4195,7 @@
     </p:spTree>
     <p:extLst>
       <p:ext uri="{BB962C8B-B14F-4D97-AF65-F5344CB8AC3E}">
-        <p14:creationId xmlns:p14="http://schemas.microsoft.com/office/powerpoint/2010/main" val="421578124"/>
+        <p14:creationId xmlns:p14="http://schemas.microsoft.com/office/powerpoint/2010/main" val="1714360283"/>
       </p:ext>
     </p:extLst>
   </p:cSld>
@@ -4350,7 +4350,7 @@
           <p:cNvPr id="23" name="">
             <a:extLst xmlns:a="http://schemas.openxmlformats.org/drawingml/2006/main">
               <a:ext uri="{FF2B5EF4-FFF2-40B4-BE49-F238E27FC236}">
-                <a16:creationId xmlns:a16="http://schemas.microsoft.com/office/drawing/2014/main" id="{A115B6C7-2C13-4305-935D-9369D367B3CF}"/>
+                <a16:creationId xmlns:a16="http://schemas.microsoft.com/office/drawing/2014/main" id="{AAE218D3-C7F8-421B-A979-0CEB5AFD247C}"/>
               </a:ext>
             </a:extLst>
           </p:cNvPr>
@@ -4382,7 +4382,7 @@
           <p:cNvPr id="2" name="">
             <a:extLst xmlns:a="http://schemas.openxmlformats.org/drawingml/2006/main">
               <a:ext uri="{FF2B5EF4-FFF2-40B4-BE49-F238E27FC236}">
-                <a16:creationId xmlns:a16="http://schemas.microsoft.com/office/drawing/2014/main" id="{BFD45C40-B0F8-46B6-ACA9-DE95C1CBB9FC}"/>
+                <a16:creationId xmlns:a16="http://schemas.microsoft.com/office/drawing/2014/main" id="{88A7D710-83D7-41AE-9954-D7F672B1B008}"/>
               </a:ext>
             </a:extLst>
           </p:cNvPr>
@@ -4439,7 +4439,7 @@
           <p:cNvPr id="3" name="">
             <a:extLst xmlns:a="http://schemas.openxmlformats.org/drawingml/2006/main">
               <a:ext uri="{FF2B5EF4-FFF2-40B4-BE49-F238E27FC236}">
-                <a16:creationId xmlns:a16="http://schemas.microsoft.com/office/drawing/2014/main" id="{1110F58C-D359-48D0-96E9-DD12B993FC8E}"/>
+                <a16:creationId xmlns:a16="http://schemas.microsoft.com/office/drawing/2014/main" id="{246E223F-6FF2-42E1-AC07-3C4DE37530B4}"/>
               </a:ext>
             </a:extLst>
           </p:cNvPr>
@@ -4471,7 +4471,7 @@
           <p:cNvPr id="4" name="">
             <a:extLst xmlns:a="http://schemas.openxmlformats.org/drawingml/2006/main">
               <a:ext uri="{FF2B5EF4-FFF2-40B4-BE49-F238E27FC236}">
-                <a16:creationId xmlns:a16="http://schemas.microsoft.com/office/drawing/2014/main" id="{4B436599-BC14-4385-A10D-FA0DD404D3A9}"/>
+                <a16:creationId xmlns:a16="http://schemas.microsoft.com/office/drawing/2014/main" id="{8288409A-77CC-4E3E-9C26-22C15DB5F21E}"/>
               </a:ext>
             </a:extLst>
           </p:cNvPr>
@@ -4528,7 +4528,7 @@
           <p:cNvPr id="5" name="">
             <a:extLst xmlns:a="http://schemas.openxmlformats.org/drawingml/2006/main">
               <a:ext uri="{FF2B5EF4-FFF2-40B4-BE49-F238E27FC236}">
-                <a16:creationId xmlns:a16="http://schemas.microsoft.com/office/drawing/2014/main" id="{66A442F6-096C-4A19-81A2-3982965C3FA1}"/>
+                <a16:creationId xmlns:a16="http://schemas.microsoft.com/office/drawing/2014/main" id="{D7274BFC-9904-48D4-BE12-B4EF94EDE5B8}"/>
               </a:ext>
             </a:extLst>
           </p:cNvPr>
@@ -4585,7 +4585,7 @@
           <p:cNvPr id="6" name="">
             <a:extLst xmlns:a="http://schemas.openxmlformats.org/drawingml/2006/main">
               <a:ext uri="{FF2B5EF4-FFF2-40B4-BE49-F238E27FC236}">
-                <a16:creationId xmlns:a16="http://schemas.microsoft.com/office/drawing/2014/main" id="{54570BDB-16A4-458D-BC7C-88A6F7D8B3D9}"/>
+                <a16:creationId xmlns:a16="http://schemas.microsoft.com/office/drawing/2014/main" id="{C27B452C-FFFF-42F0-8418-8085FB8932B0}"/>
               </a:ext>
             </a:extLst>
           </p:cNvPr>
@@ -4642,7 +4642,7 @@
           <p:cNvPr id="7" name="">
             <a:extLst xmlns:a="http://schemas.openxmlformats.org/drawingml/2006/main">
               <a:ext uri="{FF2B5EF4-FFF2-40B4-BE49-F238E27FC236}">
-                <a16:creationId xmlns:a16="http://schemas.microsoft.com/office/drawing/2014/main" id="{4F86D81B-04DA-4853-AC49-C053AEAABF24}"/>
+                <a16:creationId xmlns:a16="http://schemas.microsoft.com/office/drawing/2014/main" id="{73CB9B8E-0D51-491D-A6D0-B0EFF2F9E724}"/>
               </a:ext>
             </a:extLst>
           </p:cNvPr>
@@ -4674,7 +4674,7 @@
           <p:cNvPr id="8" name="">
             <a:extLst xmlns:a="http://schemas.openxmlformats.org/drawingml/2006/main">
               <a:ext uri="{FF2B5EF4-FFF2-40B4-BE49-F238E27FC236}">
-                <a16:creationId xmlns:a16="http://schemas.microsoft.com/office/drawing/2014/main" id="{A019CE59-36D7-4B9C-8B5F-7D6F4AE2F62E}"/>
+                <a16:creationId xmlns:a16="http://schemas.microsoft.com/office/drawing/2014/main" id="{8FA3D79D-8591-4065-B54E-A46CAB144650}"/>
               </a:ext>
             </a:extLst>
           </p:cNvPr>
@@ -4731,7 +4731,7 @@
           <p:cNvPr id="9" name="">
             <a:extLst xmlns:a="http://schemas.openxmlformats.org/drawingml/2006/main">
               <a:ext uri="{FF2B5EF4-FFF2-40B4-BE49-F238E27FC236}">
-                <a16:creationId xmlns:a16="http://schemas.microsoft.com/office/drawing/2014/main" id="{D146E87B-BC2A-49B3-9419-0799CB71C372}"/>
+                <a16:creationId xmlns:a16="http://schemas.microsoft.com/office/drawing/2014/main" id="{95CDE938-D74E-4D38-BEB2-BFF0648AD92F}"/>
               </a:ext>
             </a:extLst>
           </p:cNvPr>
@@ -4788,7 +4788,7 @@
           <p:cNvPr id="10" name="">
             <a:extLst xmlns:a="http://schemas.openxmlformats.org/drawingml/2006/main">
               <a:ext uri="{FF2B5EF4-FFF2-40B4-BE49-F238E27FC236}">
-                <a16:creationId xmlns:a16="http://schemas.microsoft.com/office/drawing/2014/main" id="{989EC932-700D-40B2-9485-1D9C8B91891B}"/>
+                <a16:creationId xmlns:a16="http://schemas.microsoft.com/office/drawing/2014/main" id="{494D5ED7-BB08-4487-838D-06AA29815B46}"/>
               </a:ext>
             </a:extLst>
           </p:cNvPr>
@@ -4822,7 +4822,7 @@
           <p:cNvPr id="11" name="">
             <a:extLst xmlns:a="http://schemas.openxmlformats.org/drawingml/2006/main">
               <a:ext uri="{FF2B5EF4-FFF2-40B4-BE49-F238E27FC236}">
-                <a16:creationId xmlns:a16="http://schemas.microsoft.com/office/drawing/2014/main" id="{E0DDF596-E91C-45E2-B6DC-8BAC33F7B1BB}"/>
+                <a16:creationId xmlns:a16="http://schemas.microsoft.com/office/drawing/2014/main" id="{CB19D34D-84C9-4F80-A33A-C4DD93B1C316}"/>
               </a:ext>
             </a:extLst>
           </p:cNvPr>
@@ -4854,7 +4854,7 @@
           <p:cNvPr id="12" name="">
             <a:extLst xmlns:a="http://schemas.openxmlformats.org/drawingml/2006/main">
               <a:ext uri="{FF2B5EF4-FFF2-40B4-BE49-F238E27FC236}">
-                <a16:creationId xmlns:a16="http://schemas.microsoft.com/office/drawing/2014/main" id="{6FB0FB59-39A4-4365-84F8-A67F3EEA72FC}"/>
+                <a16:creationId xmlns:a16="http://schemas.microsoft.com/office/drawing/2014/main" id="{802C7766-1BD4-4C52-BFB1-0A5EB0F4EB33}"/>
               </a:ext>
             </a:extLst>
           </p:cNvPr>
@@ -4911,7 +4911,7 @@
           <p:cNvPr id="13" name="">
             <a:extLst xmlns:a="http://schemas.openxmlformats.org/drawingml/2006/main">
               <a:ext uri="{FF2B5EF4-FFF2-40B4-BE49-F238E27FC236}">
-                <a16:creationId xmlns:a16="http://schemas.microsoft.com/office/drawing/2014/main" id="{E13AAAC2-72A9-4A75-8B06-B0C3F45FC5E0}"/>
+                <a16:creationId xmlns:a16="http://schemas.microsoft.com/office/drawing/2014/main" id="{E3798F64-1079-4881-8F67-92CDE0B9F26B}"/>
               </a:ext>
             </a:extLst>
           </p:cNvPr>
@@ -4968,7 +4968,7 @@
           <p:cNvPr id="14" name="">
             <a:extLst xmlns:a="http://schemas.openxmlformats.org/drawingml/2006/main">
               <a:ext uri="{FF2B5EF4-FFF2-40B4-BE49-F238E27FC236}">
-                <a16:creationId xmlns:a16="http://schemas.microsoft.com/office/drawing/2014/main" id="{A3C5ED90-09E7-489A-8E3D-D5E6ECA662C4}"/>
+                <a16:creationId xmlns:a16="http://schemas.microsoft.com/office/drawing/2014/main" id="{A186F84D-8E29-492A-A158-1F28B063E238}"/>
               </a:ext>
             </a:extLst>
           </p:cNvPr>
@@ -5002,7 +5002,7 @@
           <p:cNvPr id="15" name="">
             <a:extLst xmlns:a="http://schemas.openxmlformats.org/drawingml/2006/main">
               <a:ext uri="{FF2B5EF4-FFF2-40B4-BE49-F238E27FC236}">
-                <a16:creationId xmlns:a16="http://schemas.microsoft.com/office/drawing/2014/main" id="{313AF2C1-3F84-47BB-AD0B-EA11E6527EB8}"/>
+                <a16:creationId xmlns:a16="http://schemas.microsoft.com/office/drawing/2014/main" id="{78B6D05E-97C9-46EA-B6BE-3A2885DAB5A7}"/>
               </a:ext>
             </a:extLst>
           </p:cNvPr>
@@ -5034,7 +5034,7 @@
           <p:cNvPr id="16" name="">
             <a:extLst xmlns:a="http://schemas.openxmlformats.org/drawingml/2006/main">
               <a:ext uri="{FF2B5EF4-FFF2-40B4-BE49-F238E27FC236}">
-                <a16:creationId xmlns:a16="http://schemas.microsoft.com/office/drawing/2014/main" id="{E8AB50B6-0818-47C7-864E-85AA084FE6EA}"/>
+                <a16:creationId xmlns:a16="http://schemas.microsoft.com/office/drawing/2014/main" id="{A5884539-318E-478B-B721-7DDAE1DA98EA}"/>
               </a:ext>
             </a:extLst>
           </p:cNvPr>
@@ -5091,7 +5091,7 @@
           <p:cNvPr id="17" name="">
             <a:extLst xmlns:a="http://schemas.openxmlformats.org/drawingml/2006/main">
               <a:ext uri="{FF2B5EF4-FFF2-40B4-BE49-F238E27FC236}">
-                <a16:creationId xmlns:a16="http://schemas.microsoft.com/office/drawing/2014/main" id="{E13BE34C-7F63-4400-A452-00A0F39BC919}"/>
+                <a16:creationId xmlns:a16="http://schemas.microsoft.com/office/drawing/2014/main" id="{E11981D8-F9AF-415E-89A0-0B814D4ACB8F}"/>
               </a:ext>
             </a:extLst>
           </p:cNvPr>
@@ -5148,7 +5148,7 @@
           <p:cNvPr id="18" name="">
             <a:extLst xmlns:a="http://schemas.openxmlformats.org/drawingml/2006/main">
               <a:ext uri="{FF2B5EF4-FFF2-40B4-BE49-F238E27FC236}">
-                <a16:creationId xmlns:a16="http://schemas.microsoft.com/office/drawing/2014/main" id="{5652C9EA-477E-4CF1-8539-1E8B56EA3E78}"/>
+                <a16:creationId xmlns:a16="http://schemas.microsoft.com/office/drawing/2014/main" id="{2D03C35F-9F1C-4B3D-A30D-1ACCED683B19}"/>
               </a:ext>
             </a:extLst>
           </p:cNvPr>
@@ -5182,7 +5182,7 @@
           <p:cNvPr id="19" name="">
             <a:extLst xmlns:a="http://schemas.openxmlformats.org/drawingml/2006/main">
               <a:ext uri="{FF2B5EF4-FFF2-40B4-BE49-F238E27FC236}">
-                <a16:creationId xmlns:a16="http://schemas.microsoft.com/office/drawing/2014/main" id="{679039E3-B8F5-4F10-8186-9B3069E10D62}"/>
+                <a16:creationId xmlns:a16="http://schemas.microsoft.com/office/drawing/2014/main" id="{B120A6A9-D1F0-4FBB-AC15-12307E806410}"/>
               </a:ext>
             </a:extLst>
           </p:cNvPr>
@@ -5214,7 +5214,7 @@
           <p:cNvPr id="20" name="">
             <a:extLst xmlns:a="http://schemas.openxmlformats.org/drawingml/2006/main">
               <a:ext uri="{FF2B5EF4-FFF2-40B4-BE49-F238E27FC236}">
-                <a16:creationId xmlns:a16="http://schemas.microsoft.com/office/drawing/2014/main" id="{E6561E45-CABB-4E70-89F5-25309634BBC0}"/>
+                <a16:creationId xmlns:a16="http://schemas.microsoft.com/office/drawing/2014/main" id="{D7A76795-2457-4552-8F95-5E3F9F8B6FAD}"/>
               </a:ext>
             </a:extLst>
           </p:cNvPr>
@@ -5271,7 +5271,7 @@
           <p:cNvPr id="21" name="">
             <a:extLst xmlns:a="http://schemas.openxmlformats.org/drawingml/2006/main">
               <a:ext uri="{FF2B5EF4-FFF2-40B4-BE49-F238E27FC236}">
-                <a16:creationId xmlns:a16="http://schemas.microsoft.com/office/drawing/2014/main" id="{65DA3F04-2A10-4A17-BB3E-0453A406276A}"/>
+                <a16:creationId xmlns:a16="http://schemas.microsoft.com/office/drawing/2014/main" id="{EF2AAB00-7321-42BF-8317-E9E0CB4B9DA9}"/>
               </a:ext>
             </a:extLst>
           </p:cNvPr>
@@ -5328,7 +5328,7 @@
           <p:cNvPr id="22" name="">
             <a:extLst xmlns:a="http://schemas.openxmlformats.org/drawingml/2006/main">
               <a:ext uri="{FF2B5EF4-FFF2-40B4-BE49-F238E27FC236}">
-                <a16:creationId xmlns:a16="http://schemas.microsoft.com/office/drawing/2014/main" id="{1A13753D-E889-4820-80D6-883568C8B206}"/>
+                <a16:creationId xmlns:a16="http://schemas.microsoft.com/office/drawing/2014/main" id="{A8912094-241A-4BE1-93AC-5509E7E86457}"/>
               </a:ext>
             </a:extLst>
           </p:cNvPr>
@@ -5383,7 +5383,7 @@
     </p:spTree>
     <p:extLst>
       <p:ext uri="{BB962C8B-B14F-4D97-AF65-F5344CB8AC3E}">
-        <p14:creationId xmlns:p14="http://schemas.microsoft.com/office/powerpoint/2010/main" val="1423410489"/>
+        <p14:creationId xmlns:p14="http://schemas.microsoft.com/office/powerpoint/2010/main" val="415997117"/>
       </p:ext>
     </p:extLst>
   </p:cSld>
@@ -5584,7 +5584,7 @@
           <p:cNvPr id="23" name="">
             <a:extLst xmlns:a="http://schemas.openxmlformats.org/drawingml/2006/main">
               <a:ext uri="{FF2B5EF4-FFF2-40B4-BE49-F238E27FC236}">
-                <a16:creationId xmlns:a16="http://schemas.microsoft.com/office/drawing/2014/main" id="{EEF446DA-4E56-4E74-975B-3B5CD3D03B9B}"/>
+                <a16:creationId xmlns:a16="http://schemas.microsoft.com/office/drawing/2014/main" id="{6DAFB096-D7EB-44C1-869C-DC1763807673}"/>
               </a:ext>
             </a:extLst>
           </p:cNvPr>
@@ -5616,7 +5616,7 @@
           <p:cNvPr id="2" name="">
             <a:extLst xmlns:a="http://schemas.openxmlformats.org/drawingml/2006/main">
               <a:ext uri="{FF2B5EF4-FFF2-40B4-BE49-F238E27FC236}">
-                <a16:creationId xmlns:a16="http://schemas.microsoft.com/office/drawing/2014/main" id="{E8FC0E17-6907-42AC-9BF4-EC61F6DAB316}"/>
+                <a16:creationId xmlns:a16="http://schemas.microsoft.com/office/drawing/2014/main" id="{5B8A2CF2-3700-434D-BF46-35228C951047}"/>
               </a:ext>
             </a:extLst>
           </p:cNvPr>
@@ -5673,7 +5673,7 @@
           <p:cNvPr id="3" name="">
             <a:extLst xmlns:a="http://schemas.openxmlformats.org/drawingml/2006/main">
               <a:ext uri="{FF2B5EF4-FFF2-40B4-BE49-F238E27FC236}">
-                <a16:creationId xmlns:a16="http://schemas.microsoft.com/office/drawing/2014/main" id="{C7908B72-DEBC-4FD4-815F-BA4F2C1EAA0D}"/>
+                <a16:creationId xmlns:a16="http://schemas.microsoft.com/office/drawing/2014/main" id="{DA8D6009-0525-444A-9084-8FFFA9B5206E}"/>
               </a:ext>
             </a:extLst>
           </p:cNvPr>
@@ -5705,7 +5705,7 @@
           <p:cNvPr id="4" name="">
             <a:extLst xmlns:a="http://schemas.openxmlformats.org/drawingml/2006/main">
               <a:ext uri="{FF2B5EF4-FFF2-40B4-BE49-F238E27FC236}">
-                <a16:creationId xmlns:a16="http://schemas.microsoft.com/office/drawing/2014/main" id="{B4A27C88-5146-4444-8CF2-C02EBDCA03AA}"/>
+                <a16:creationId xmlns:a16="http://schemas.microsoft.com/office/drawing/2014/main" id="{BA518609-7B57-45EA-9C75-6A0A17B0352D}"/>
               </a:ext>
             </a:extLst>
           </p:cNvPr>
@@ -5762,7 +5762,7 @@
           <p:cNvPr id="5" name="">
             <a:extLst xmlns:a="http://schemas.openxmlformats.org/drawingml/2006/main">
               <a:ext uri="{FF2B5EF4-FFF2-40B4-BE49-F238E27FC236}">
-                <a16:creationId xmlns:a16="http://schemas.microsoft.com/office/drawing/2014/main" id="{2504F845-702B-4DE5-BF6D-62B14DAB9A64}"/>
+                <a16:creationId xmlns:a16="http://schemas.microsoft.com/office/drawing/2014/main" id="{D814FA23-825A-4F27-8184-537F3B974BBB}"/>
               </a:ext>
             </a:extLst>
           </p:cNvPr>
@@ -5819,7 +5819,7 @@
           <p:cNvPr id="6" name="">
             <a:extLst xmlns:a="http://schemas.openxmlformats.org/drawingml/2006/main">
               <a:ext uri="{FF2B5EF4-FFF2-40B4-BE49-F238E27FC236}">
-                <a16:creationId xmlns:a16="http://schemas.microsoft.com/office/drawing/2014/main" id="{5F945BE4-DBCB-403D-9A2F-39C0BD50C660}"/>
+                <a16:creationId xmlns:a16="http://schemas.microsoft.com/office/drawing/2014/main" id="{DD6B9FDE-A99E-4D89-B0EC-92FF4E8D492D}"/>
               </a:ext>
             </a:extLst>
           </p:cNvPr>
@@ -5876,7 +5876,7 @@
           <p:cNvPr id="7" name="">
             <a:extLst xmlns:a="http://schemas.openxmlformats.org/drawingml/2006/main">
               <a:ext uri="{FF2B5EF4-FFF2-40B4-BE49-F238E27FC236}">
-                <a16:creationId xmlns:a16="http://schemas.microsoft.com/office/drawing/2014/main" id="{C6695774-31F8-4A1D-98A5-66A2726C365B}"/>
+                <a16:creationId xmlns:a16="http://schemas.microsoft.com/office/drawing/2014/main" id="{257F3286-F201-49EE-AB31-429D7AC0B917}"/>
               </a:ext>
             </a:extLst>
           </p:cNvPr>
@@ -5908,7 +5908,7 @@
           <p:cNvPr id="8" name="">
             <a:extLst xmlns:a="http://schemas.openxmlformats.org/drawingml/2006/main">
               <a:ext uri="{FF2B5EF4-FFF2-40B4-BE49-F238E27FC236}">
-                <a16:creationId xmlns:a16="http://schemas.microsoft.com/office/drawing/2014/main" id="{07CE721A-C00E-4FDC-BA02-A5B054D54969}"/>
+                <a16:creationId xmlns:a16="http://schemas.microsoft.com/office/drawing/2014/main" id="{FFDC9F78-94D1-42D6-B61D-8598196C08F2}"/>
               </a:ext>
             </a:extLst>
           </p:cNvPr>
@@ -5965,7 +5965,7 @@
           <p:cNvPr id="9" name="">
             <a:extLst xmlns:a="http://schemas.openxmlformats.org/drawingml/2006/main">
               <a:ext uri="{FF2B5EF4-FFF2-40B4-BE49-F238E27FC236}">
-                <a16:creationId xmlns:a16="http://schemas.microsoft.com/office/drawing/2014/main" id="{AB159146-1BE3-45B3-97F4-618E367F7734}"/>
+                <a16:creationId xmlns:a16="http://schemas.microsoft.com/office/drawing/2014/main" id="{5E34EB84-05A9-4BA5-87B2-2F08A295AFA3}"/>
               </a:ext>
             </a:extLst>
           </p:cNvPr>
@@ -6022,7 +6022,7 @@
           <p:cNvPr id="10" name="">
             <a:extLst xmlns:a="http://schemas.openxmlformats.org/drawingml/2006/main">
               <a:ext uri="{FF2B5EF4-FFF2-40B4-BE49-F238E27FC236}">
-                <a16:creationId xmlns:a16="http://schemas.microsoft.com/office/drawing/2014/main" id="{2B3154C2-7D96-4944-AFA7-B94AC2E7E44F}"/>
+                <a16:creationId xmlns:a16="http://schemas.microsoft.com/office/drawing/2014/main" id="{5E6388CB-E372-45C4-A151-0FA13D16DB1C}"/>
               </a:ext>
             </a:extLst>
           </p:cNvPr>
@@ -6056,7 +6056,7 @@
           <p:cNvPr id="11" name="">
             <a:extLst xmlns:a="http://schemas.openxmlformats.org/drawingml/2006/main">
               <a:ext uri="{FF2B5EF4-FFF2-40B4-BE49-F238E27FC236}">
-                <a16:creationId xmlns:a16="http://schemas.microsoft.com/office/drawing/2014/main" id="{8EDE093F-456F-4D6F-9DF6-AD22E43CF43B}"/>
+                <a16:creationId xmlns:a16="http://schemas.microsoft.com/office/drawing/2014/main" id="{8966BC23-81BD-413A-AE9C-9BCD2DF20073}"/>
               </a:ext>
             </a:extLst>
           </p:cNvPr>
@@ -6088,7 +6088,7 @@
           <p:cNvPr id="12" name="">
             <a:extLst xmlns:a="http://schemas.openxmlformats.org/drawingml/2006/main">
               <a:ext uri="{FF2B5EF4-FFF2-40B4-BE49-F238E27FC236}">
-                <a16:creationId xmlns:a16="http://schemas.microsoft.com/office/drawing/2014/main" id="{E6879A89-56BF-4B20-835C-A4666FD63B0D}"/>
+                <a16:creationId xmlns:a16="http://schemas.microsoft.com/office/drawing/2014/main" id="{4B2DD9E5-F14D-4A01-BD46-A7B12964DF21}"/>
               </a:ext>
             </a:extLst>
           </p:cNvPr>
@@ -6145,7 +6145,7 @@
           <p:cNvPr id="13" name="">
             <a:extLst xmlns:a="http://schemas.openxmlformats.org/drawingml/2006/main">
               <a:ext uri="{FF2B5EF4-FFF2-40B4-BE49-F238E27FC236}">
-                <a16:creationId xmlns:a16="http://schemas.microsoft.com/office/drawing/2014/main" id="{A9AB9091-3A6C-4565-8381-365F76302329}"/>
+                <a16:creationId xmlns:a16="http://schemas.microsoft.com/office/drawing/2014/main" id="{890D56D4-A002-4E6D-9C1C-BEBB71A2E0FC}"/>
               </a:ext>
             </a:extLst>
           </p:cNvPr>
@@ -6202,7 +6202,7 @@
           <p:cNvPr id="14" name="">
             <a:extLst xmlns:a="http://schemas.openxmlformats.org/drawingml/2006/main">
               <a:ext uri="{FF2B5EF4-FFF2-40B4-BE49-F238E27FC236}">
-                <a16:creationId xmlns:a16="http://schemas.microsoft.com/office/drawing/2014/main" id="{C8400F6A-72A1-458E-8599-D06DAE9C3410}"/>
+                <a16:creationId xmlns:a16="http://schemas.microsoft.com/office/drawing/2014/main" id="{2C5BF442-9ABC-4B76-ACF6-3AA83C07991E}"/>
               </a:ext>
             </a:extLst>
           </p:cNvPr>
@@ -6236,7 +6236,7 @@
           <p:cNvPr id="15" name="">
             <a:extLst xmlns:a="http://schemas.openxmlformats.org/drawingml/2006/main">
               <a:ext uri="{FF2B5EF4-FFF2-40B4-BE49-F238E27FC236}">
-                <a16:creationId xmlns:a16="http://schemas.microsoft.com/office/drawing/2014/main" id="{8E4AABE1-82C2-41CC-83F4-0E5888637E22}"/>
+                <a16:creationId xmlns:a16="http://schemas.microsoft.com/office/drawing/2014/main" id="{3495B605-5918-4BDE-8369-AC9BF1B1C7D9}"/>
               </a:ext>
             </a:extLst>
           </p:cNvPr>
@@ -6268,7 +6268,7 @@
           <p:cNvPr id="16" name="">
             <a:extLst xmlns:a="http://schemas.openxmlformats.org/drawingml/2006/main">
               <a:ext uri="{FF2B5EF4-FFF2-40B4-BE49-F238E27FC236}">
-                <a16:creationId xmlns:a16="http://schemas.microsoft.com/office/drawing/2014/main" id="{65F44851-5359-4424-BDA3-615BF9D15A43}"/>
+                <a16:creationId xmlns:a16="http://schemas.microsoft.com/office/drawing/2014/main" id="{BD9B8868-5EB9-429F-B58C-11F1D5F382F6}"/>
               </a:ext>
             </a:extLst>
           </p:cNvPr>
@@ -6325,7 +6325,7 @@
           <p:cNvPr id="17" name="">
             <a:extLst xmlns:a="http://schemas.openxmlformats.org/drawingml/2006/main">
               <a:ext uri="{FF2B5EF4-FFF2-40B4-BE49-F238E27FC236}">
-                <a16:creationId xmlns:a16="http://schemas.microsoft.com/office/drawing/2014/main" id="{210E8A1C-3A19-4F4F-9709-0A362179AD2E}"/>
+                <a16:creationId xmlns:a16="http://schemas.microsoft.com/office/drawing/2014/main" id="{36A1FB6E-EF8C-4085-8705-5A450538D646}"/>
               </a:ext>
             </a:extLst>
           </p:cNvPr>
@@ -6382,7 +6382,7 @@
           <p:cNvPr id="18" name="">
             <a:extLst xmlns:a="http://schemas.openxmlformats.org/drawingml/2006/main">
               <a:ext uri="{FF2B5EF4-FFF2-40B4-BE49-F238E27FC236}">
-                <a16:creationId xmlns:a16="http://schemas.microsoft.com/office/drawing/2014/main" id="{A7D29160-83E7-4652-9725-EABCD124D41D}"/>
+                <a16:creationId xmlns:a16="http://schemas.microsoft.com/office/drawing/2014/main" id="{D08C1C8C-4FF7-4A1E-8B44-D22DF26486E6}"/>
               </a:ext>
             </a:extLst>
           </p:cNvPr>
@@ -6416,7 +6416,7 @@
           <p:cNvPr id="19" name="">
             <a:extLst xmlns:a="http://schemas.openxmlformats.org/drawingml/2006/main">
               <a:ext uri="{FF2B5EF4-FFF2-40B4-BE49-F238E27FC236}">
-                <a16:creationId xmlns:a16="http://schemas.microsoft.com/office/drawing/2014/main" id="{7B22E9F6-66A2-4349-898D-D3F46695B45D}"/>
+                <a16:creationId xmlns:a16="http://schemas.microsoft.com/office/drawing/2014/main" id="{B88021B0-4508-4EF6-971B-CAC7AE7ECF8F}"/>
               </a:ext>
             </a:extLst>
           </p:cNvPr>
@@ -6448,7 +6448,7 @@
           <p:cNvPr id="20" name="">
             <a:extLst xmlns:a="http://schemas.openxmlformats.org/drawingml/2006/main">
               <a:ext uri="{FF2B5EF4-FFF2-40B4-BE49-F238E27FC236}">
-                <a16:creationId xmlns:a16="http://schemas.microsoft.com/office/drawing/2014/main" id="{0265CFC7-2D3F-438F-98F5-7DD6BB10962B}"/>
+                <a16:creationId xmlns:a16="http://schemas.microsoft.com/office/drawing/2014/main" id="{BBA4FF53-7507-4D6B-BCA2-DC7DDEF02AF1}"/>
               </a:ext>
             </a:extLst>
           </p:cNvPr>
@@ -6505,7 +6505,7 @@
           <p:cNvPr id="21" name="">
             <a:extLst xmlns:a="http://schemas.openxmlformats.org/drawingml/2006/main">
               <a:ext uri="{FF2B5EF4-FFF2-40B4-BE49-F238E27FC236}">
-                <a16:creationId xmlns:a16="http://schemas.microsoft.com/office/drawing/2014/main" id="{E3D3B731-5C0E-4E19-A083-755A0C6FFB8F}"/>
+                <a16:creationId xmlns:a16="http://schemas.microsoft.com/office/drawing/2014/main" id="{0580BD82-78AB-4A9D-A1B0-37ACBB9DCEC9}"/>
               </a:ext>
             </a:extLst>
           </p:cNvPr>
@@ -6562,7 +6562,7 @@
           <p:cNvPr id="22" name="">
             <a:extLst xmlns:a="http://schemas.openxmlformats.org/drawingml/2006/main">
               <a:ext uri="{FF2B5EF4-FFF2-40B4-BE49-F238E27FC236}">
-                <a16:creationId xmlns:a16="http://schemas.microsoft.com/office/drawing/2014/main" id="{8E2F1B2E-2B1B-42C1-9E87-35B606F95C40}"/>
+                <a16:creationId xmlns:a16="http://schemas.microsoft.com/office/drawing/2014/main" id="{D9C71CF8-96B5-4788-BDDA-079986D9CCF7}"/>
               </a:ext>
             </a:extLst>
           </p:cNvPr>
@@ -6617,7 +6617,7 @@
     </p:spTree>
     <p:extLst>
       <p:ext uri="{BB962C8B-B14F-4D97-AF65-F5344CB8AC3E}">
-        <p14:creationId xmlns:p14="http://schemas.microsoft.com/office/powerpoint/2010/main" val="1878742018"/>
+        <p14:creationId xmlns:p14="http://schemas.microsoft.com/office/powerpoint/2010/main" val="907822555"/>
       </p:ext>
     </p:extLst>
   </p:cSld>
@@ -6818,7 +6818,7 @@
           <p:cNvPr id="16" name="">
             <a:extLst xmlns:a="http://schemas.openxmlformats.org/drawingml/2006/main">
               <a:ext uri="{FF2B5EF4-FFF2-40B4-BE49-F238E27FC236}">
-                <a16:creationId xmlns:a16="http://schemas.microsoft.com/office/drawing/2014/main" id="{52769B2C-5090-495C-A16F-3DD345082070}"/>
+                <a16:creationId xmlns:a16="http://schemas.microsoft.com/office/drawing/2014/main" id="{FD5526B5-35E1-49E0-89B1-A79C2A0C359D}"/>
               </a:ext>
             </a:extLst>
           </p:cNvPr>
@@ -6850,7 +6850,7 @@
           <p:cNvPr id="2" name="">
             <a:extLst xmlns:a="http://schemas.openxmlformats.org/drawingml/2006/main">
               <a:ext uri="{FF2B5EF4-FFF2-40B4-BE49-F238E27FC236}">
-                <a16:creationId xmlns:a16="http://schemas.microsoft.com/office/drawing/2014/main" id="{331731F6-BB90-47CC-94D3-54C3D7CC10AC}"/>
+                <a16:creationId xmlns:a16="http://schemas.microsoft.com/office/drawing/2014/main" id="{501C873D-309E-48F7-99EF-EDD89FC0F6E4}"/>
               </a:ext>
             </a:extLst>
           </p:cNvPr>
@@ -6907,7 +6907,7 @@
           <p:cNvPr id="3" name="">
             <a:extLst xmlns:a="http://schemas.openxmlformats.org/drawingml/2006/main">
               <a:ext uri="{FF2B5EF4-FFF2-40B4-BE49-F238E27FC236}">
-                <a16:creationId xmlns:a16="http://schemas.microsoft.com/office/drawing/2014/main" id="{542663FD-9CC0-4D08-A1C1-373A3744DB05}"/>
+                <a16:creationId xmlns:a16="http://schemas.microsoft.com/office/drawing/2014/main" id="{92C4B8F2-071D-4DE9-9519-1A61878A8D77}"/>
               </a:ext>
             </a:extLst>
           </p:cNvPr>
@@ -6939,7 +6939,7 @@
           <p:cNvPr id="4" name="">
             <a:extLst xmlns:a="http://schemas.openxmlformats.org/drawingml/2006/main">
               <a:ext uri="{FF2B5EF4-FFF2-40B4-BE49-F238E27FC236}">
-                <a16:creationId xmlns:a16="http://schemas.microsoft.com/office/drawing/2014/main" id="{85578F07-C35E-4ED3-A719-D94EC5846801}"/>
+                <a16:creationId xmlns:a16="http://schemas.microsoft.com/office/drawing/2014/main" id="{38835688-7AAB-4F03-9C19-DECEF61D2B4C}"/>
               </a:ext>
             </a:extLst>
           </p:cNvPr>
@@ -6996,7 +6996,7 @@
           <p:cNvPr id="5" name="">
             <a:extLst xmlns:a="http://schemas.openxmlformats.org/drawingml/2006/main">
               <a:ext uri="{FF2B5EF4-FFF2-40B4-BE49-F238E27FC236}">
-                <a16:creationId xmlns:a16="http://schemas.microsoft.com/office/drawing/2014/main" id="{25630416-5676-4D8E-9FDB-F6C2E2CF85D5}"/>
+                <a16:creationId xmlns:a16="http://schemas.microsoft.com/office/drawing/2014/main" id="{9E594726-BF64-47D4-A080-CF816E569AC3}"/>
               </a:ext>
             </a:extLst>
           </p:cNvPr>
@@ -7053,7 +7053,7 @@
           <p:cNvPr id="6" name="">
             <a:extLst xmlns:a="http://schemas.openxmlformats.org/drawingml/2006/main">
               <a:ext uri="{FF2B5EF4-FFF2-40B4-BE49-F238E27FC236}">
-                <a16:creationId xmlns:a16="http://schemas.microsoft.com/office/drawing/2014/main" id="{F4E59EFE-FB53-4BD5-8C3C-DA3F26854151}"/>
+                <a16:creationId xmlns:a16="http://schemas.microsoft.com/office/drawing/2014/main" id="{006EC0AD-BFFC-40BE-B6EB-9B490CEABFB8}"/>
               </a:ext>
             </a:extLst>
           </p:cNvPr>
@@ -7110,7 +7110,7 @@
           <p:cNvPr id="7" name="">
             <a:extLst xmlns:a="http://schemas.openxmlformats.org/drawingml/2006/main">
               <a:ext uri="{FF2B5EF4-FFF2-40B4-BE49-F238E27FC236}">
-                <a16:creationId xmlns:a16="http://schemas.microsoft.com/office/drawing/2014/main" id="{5339BBEC-A211-4662-ABD7-8A0E4AC834DF}"/>
+                <a16:creationId xmlns:a16="http://schemas.microsoft.com/office/drawing/2014/main" id="{53D48886-565F-42D2-AF29-E2D7E5E3B2F5}"/>
               </a:ext>
             </a:extLst>
           </p:cNvPr>
@@ -7142,7 +7142,7 @@
           <p:cNvPr id="8" name="">
             <a:extLst xmlns:a="http://schemas.openxmlformats.org/drawingml/2006/main">
               <a:ext uri="{FF2B5EF4-FFF2-40B4-BE49-F238E27FC236}">
-                <a16:creationId xmlns:a16="http://schemas.microsoft.com/office/drawing/2014/main" id="{C31A4713-FC4C-4899-9CEF-89DCFBD2C7BB}"/>
+                <a16:creationId xmlns:a16="http://schemas.microsoft.com/office/drawing/2014/main" id="{EB47E125-B62E-41F1-9C30-3B9B2E3D6403}"/>
               </a:ext>
             </a:extLst>
           </p:cNvPr>
@@ -7199,7 +7199,7 @@
           <p:cNvPr id="9" name="">
             <a:extLst xmlns:a="http://schemas.openxmlformats.org/drawingml/2006/main">
               <a:ext uri="{FF2B5EF4-FFF2-40B4-BE49-F238E27FC236}">
-                <a16:creationId xmlns:a16="http://schemas.microsoft.com/office/drawing/2014/main" id="{9276ECC0-6EE5-47CC-A6AD-DF5F3F2EB871}"/>
+                <a16:creationId xmlns:a16="http://schemas.microsoft.com/office/drawing/2014/main" id="{14B307A9-FEB7-4D94-93BA-46D5FF842A66}"/>
               </a:ext>
             </a:extLst>
           </p:cNvPr>
@@ -7256,7 +7256,7 @@
           <p:cNvPr id="10" name="">
             <a:extLst xmlns:a="http://schemas.openxmlformats.org/drawingml/2006/main">
               <a:ext uri="{FF2B5EF4-FFF2-40B4-BE49-F238E27FC236}">
-                <a16:creationId xmlns:a16="http://schemas.microsoft.com/office/drawing/2014/main" id="{A5CE0276-B401-4F41-AE22-3B95A969D491}"/>
+                <a16:creationId xmlns:a16="http://schemas.microsoft.com/office/drawing/2014/main" id="{04A4A458-36D3-4746-9621-57DCFC0C9F6B}"/>
               </a:ext>
             </a:extLst>
           </p:cNvPr>
@@ -7313,7 +7313,7 @@
           <p:cNvPr id="11" name="">
             <a:extLst xmlns:a="http://schemas.openxmlformats.org/drawingml/2006/main">
               <a:ext uri="{FF2B5EF4-FFF2-40B4-BE49-F238E27FC236}">
-                <a16:creationId xmlns:a16="http://schemas.microsoft.com/office/drawing/2014/main" id="{6AF9F43A-4B2A-49B2-B18D-6FD0376478BB}"/>
+                <a16:creationId xmlns:a16="http://schemas.microsoft.com/office/drawing/2014/main" id="{5271374B-04DA-4E42-969A-BD8163F74EDE}"/>
               </a:ext>
             </a:extLst>
           </p:cNvPr>
@@ -7345,7 +7345,7 @@
           <p:cNvPr id="12" name="">
             <a:extLst xmlns:a="http://schemas.openxmlformats.org/drawingml/2006/main">
               <a:ext uri="{FF2B5EF4-FFF2-40B4-BE49-F238E27FC236}">
-                <a16:creationId xmlns:a16="http://schemas.microsoft.com/office/drawing/2014/main" id="{7F67AAE4-7FEB-40C5-9F7B-FAE465380951}"/>
+                <a16:creationId xmlns:a16="http://schemas.microsoft.com/office/drawing/2014/main" id="{6E1C5DE8-F327-480A-AE34-1BEB74BBF2D9}"/>
               </a:ext>
             </a:extLst>
           </p:cNvPr>
@@ -7402,7 +7402,7 @@
           <p:cNvPr id="13" name="">
             <a:extLst xmlns:a="http://schemas.openxmlformats.org/drawingml/2006/main">
               <a:ext uri="{FF2B5EF4-FFF2-40B4-BE49-F238E27FC236}">
-                <a16:creationId xmlns:a16="http://schemas.microsoft.com/office/drawing/2014/main" id="{9FC273A7-2AD8-4842-987D-48C582453DEE}"/>
+                <a16:creationId xmlns:a16="http://schemas.microsoft.com/office/drawing/2014/main" id="{71CC04AD-6329-4DEC-9C04-29FB5B9B4AB6}"/>
               </a:ext>
             </a:extLst>
           </p:cNvPr>
@@ -7459,7 +7459,7 @@
           <p:cNvPr id="14" name="">
             <a:extLst xmlns:a="http://schemas.openxmlformats.org/drawingml/2006/main">
               <a:ext uri="{FF2B5EF4-FFF2-40B4-BE49-F238E27FC236}">
-                <a16:creationId xmlns:a16="http://schemas.microsoft.com/office/drawing/2014/main" id="{DF8024B0-179F-4F2C-9C30-9025331FBD0C}"/>
+                <a16:creationId xmlns:a16="http://schemas.microsoft.com/office/drawing/2014/main" id="{0218657B-E786-43A8-96CB-35C7E0D76777}"/>
               </a:ext>
             </a:extLst>
           </p:cNvPr>
@@ -7516,7 +7516,7 @@
           <p:cNvPr id="15" name="">
             <a:extLst xmlns:a="http://schemas.openxmlformats.org/drawingml/2006/main">
               <a:ext uri="{FF2B5EF4-FFF2-40B4-BE49-F238E27FC236}">
-                <a16:creationId xmlns:a16="http://schemas.microsoft.com/office/drawing/2014/main" id="{C8FB3086-0960-45A4-AAFF-55575E7ACC31}"/>
+                <a16:creationId xmlns:a16="http://schemas.microsoft.com/office/drawing/2014/main" id="{0E9B98D0-BE60-4158-A07A-175E493B6B44}"/>
               </a:ext>
             </a:extLst>
           </p:cNvPr>
@@ -7571,7 +7571,7 @@
     </p:spTree>
     <p:extLst>
       <p:ext uri="{BB962C8B-B14F-4D97-AF65-F5344CB8AC3E}">
-        <p14:creationId xmlns:p14="http://schemas.microsoft.com/office/powerpoint/2010/main" val="1652029829"/>
+        <p14:creationId xmlns:p14="http://schemas.microsoft.com/office/powerpoint/2010/main" val="662173699"/>
       </p:ext>
     </p:extLst>
   </p:cSld>
@@ -7772,7 +7772,7 @@
           <p:cNvPr id="23" name="">
             <a:extLst xmlns:a="http://schemas.openxmlformats.org/drawingml/2006/main">
               <a:ext uri="{FF2B5EF4-FFF2-40B4-BE49-F238E27FC236}">
-                <a16:creationId xmlns:a16="http://schemas.microsoft.com/office/drawing/2014/main" id="{3FB7DE94-CB01-4FE2-ABF1-5CF0855C698E}"/>
+                <a16:creationId xmlns:a16="http://schemas.microsoft.com/office/drawing/2014/main" id="{7F92E8AA-EB02-4844-98ED-2054D673BF09}"/>
               </a:ext>
             </a:extLst>
           </p:cNvPr>
@@ -7804,7 +7804,7 @@
           <p:cNvPr id="2" name="">
             <a:extLst xmlns:a="http://schemas.openxmlformats.org/drawingml/2006/main">
               <a:ext uri="{FF2B5EF4-FFF2-40B4-BE49-F238E27FC236}">
-                <a16:creationId xmlns:a16="http://schemas.microsoft.com/office/drawing/2014/main" id="{FFB14274-9871-4EE5-B960-A8AB4F1B7539}"/>
+                <a16:creationId xmlns:a16="http://schemas.microsoft.com/office/drawing/2014/main" id="{78AE8E34-EA4C-48B5-95A0-66B5E4656C05}"/>
               </a:ext>
             </a:extLst>
           </p:cNvPr>
@@ -7861,7 +7861,7 @@
           <p:cNvPr id="3" name="">
             <a:extLst xmlns:a="http://schemas.openxmlformats.org/drawingml/2006/main">
               <a:ext uri="{FF2B5EF4-FFF2-40B4-BE49-F238E27FC236}">
-                <a16:creationId xmlns:a16="http://schemas.microsoft.com/office/drawing/2014/main" id="{3A302239-FAFC-48D3-AFE3-FC3346FD6045}"/>
+                <a16:creationId xmlns:a16="http://schemas.microsoft.com/office/drawing/2014/main" id="{8DD0835B-042E-4F94-8979-773D3AB2E8E7}"/>
               </a:ext>
             </a:extLst>
           </p:cNvPr>
@@ -7893,7 +7893,7 @@
           <p:cNvPr id="4" name="">
             <a:extLst xmlns:a="http://schemas.openxmlformats.org/drawingml/2006/main">
               <a:ext uri="{FF2B5EF4-FFF2-40B4-BE49-F238E27FC236}">
-                <a16:creationId xmlns:a16="http://schemas.microsoft.com/office/drawing/2014/main" id="{9A3C2222-F786-4C81-AEE1-6F5D9727B479}"/>
+                <a16:creationId xmlns:a16="http://schemas.microsoft.com/office/drawing/2014/main" id="{7F4CF687-0C45-483D-81B6-BDBFD823D54C}"/>
               </a:ext>
             </a:extLst>
           </p:cNvPr>
@@ -7950,7 +7950,7 @@
           <p:cNvPr id="5" name="">
             <a:extLst xmlns:a="http://schemas.openxmlformats.org/drawingml/2006/main">
               <a:ext uri="{FF2B5EF4-FFF2-40B4-BE49-F238E27FC236}">
-                <a16:creationId xmlns:a16="http://schemas.microsoft.com/office/drawing/2014/main" id="{9F8FBF5D-4825-44BA-91E5-CDCEEB09E3B1}"/>
+                <a16:creationId xmlns:a16="http://schemas.microsoft.com/office/drawing/2014/main" id="{A4503561-09D8-4AF7-A834-3D8808719E56}"/>
               </a:ext>
             </a:extLst>
           </p:cNvPr>
@@ -8007,7 +8007,7 @@
           <p:cNvPr id="6" name="">
             <a:extLst xmlns:a="http://schemas.openxmlformats.org/drawingml/2006/main">
               <a:ext uri="{FF2B5EF4-FFF2-40B4-BE49-F238E27FC236}">
-                <a16:creationId xmlns:a16="http://schemas.microsoft.com/office/drawing/2014/main" id="{7361F5D9-5EAF-40F3-87E5-0C8887BE4990}"/>
+                <a16:creationId xmlns:a16="http://schemas.microsoft.com/office/drawing/2014/main" id="{4FC9A89A-77DF-4FED-A9A9-24563D0E7A6B}"/>
               </a:ext>
             </a:extLst>
           </p:cNvPr>
@@ -8064,7 +8064,7 @@
           <p:cNvPr id="7" name="">
             <a:extLst xmlns:a="http://schemas.openxmlformats.org/drawingml/2006/main">
               <a:ext uri="{FF2B5EF4-FFF2-40B4-BE49-F238E27FC236}">
-                <a16:creationId xmlns:a16="http://schemas.microsoft.com/office/drawing/2014/main" id="{2C985807-6F3D-415C-8F5F-5E4FC975EAB3}"/>
+                <a16:creationId xmlns:a16="http://schemas.microsoft.com/office/drawing/2014/main" id="{5869083E-1DA6-4C31-B987-60833D891D21}"/>
               </a:ext>
             </a:extLst>
           </p:cNvPr>
@@ -8096,7 +8096,7 @@
           <p:cNvPr id="8" name="">
             <a:extLst xmlns:a="http://schemas.openxmlformats.org/drawingml/2006/main">
               <a:ext uri="{FF2B5EF4-FFF2-40B4-BE49-F238E27FC236}">
-                <a16:creationId xmlns:a16="http://schemas.microsoft.com/office/drawing/2014/main" id="{806F84F2-BECF-410A-AF4B-6970B1261300}"/>
+                <a16:creationId xmlns:a16="http://schemas.microsoft.com/office/drawing/2014/main" id="{23B5C835-C5A3-4522-9088-D508C0B22C65}"/>
               </a:ext>
             </a:extLst>
           </p:cNvPr>
@@ -8153,7 +8153,7 @@
           <p:cNvPr id="9" name="">
             <a:extLst xmlns:a="http://schemas.openxmlformats.org/drawingml/2006/main">
               <a:ext uri="{FF2B5EF4-FFF2-40B4-BE49-F238E27FC236}">
-                <a16:creationId xmlns:a16="http://schemas.microsoft.com/office/drawing/2014/main" id="{C57B3CA1-936B-4FE3-9256-CE1DA6FC2BC2}"/>
+                <a16:creationId xmlns:a16="http://schemas.microsoft.com/office/drawing/2014/main" id="{5D2073CF-BD71-4BF9-9AF2-5B5CE664F148}"/>
               </a:ext>
             </a:extLst>
           </p:cNvPr>
@@ -8210,19 +8210,19 @@
           <p:cNvPr id="10" name="">
             <a:extLst xmlns:a="http://schemas.openxmlformats.org/drawingml/2006/main">
               <a:ext uri="{FF2B5EF4-FFF2-40B4-BE49-F238E27FC236}">
-                <a16:creationId xmlns:a16="http://schemas.microsoft.com/office/drawing/2014/main" id="{930B369C-8D30-4E93-A7CE-81C288CAB12E}"/>
-              </a:ext>
-            </a:extLst>
-          </p:cNvPr>
-          <p:cNvSpPr>
-            <a:spLocks xmlns:a="http://schemas.openxmlformats.org/drawingml/2006/main" noGrp="1"/>
-          </p:cNvSpPr>
-          <p:nvPr/>
-        </p:nvSpPr>
-        <p:spPr>
-          <a:xfrm xmlns:a="http://schemas.openxmlformats.org/drawingml/2006/main">
-            <a:off x="914400" y="1257300"/>
-            <a:ext cx="10363200" cy="781050"/>
+                <a16:creationId xmlns:a16="http://schemas.microsoft.com/office/drawing/2014/main" id="{D315383D-798D-4FA4-9258-731BD5469D81}"/>
+              </a:ext>
+            </a:extLst>
+          </p:cNvPr>
+          <p:cNvSpPr>
+            <a:spLocks xmlns:a="http://schemas.openxmlformats.org/drawingml/2006/main" noGrp="1"/>
+          </p:cNvSpPr>
+          <p:nvPr/>
+        </p:nvSpPr>
+        <p:spPr>
+          <a:xfrm xmlns:a="http://schemas.openxmlformats.org/drawingml/2006/main">
+            <a:off x="857250" y="1219200"/>
+            <a:ext cx="10477500" cy="742950"/>
           </a:xfrm>
           <a:prstGeom xmlns:a="http://schemas.openxmlformats.org/drawingml/2006/main" prst="rect">
             <a:avLst/>
@@ -8239,7 +8239,7 @@
           <a:lstStyle xmlns:a="http://schemas.openxmlformats.org/drawingml/2006/main"/>
           <a:p xmlns:a="http://schemas.openxmlformats.org/drawingml/2006/main">
             <a:pPr algn="ctr">
-              <a:defRPr sz="2175" b="1">
+              <a:defRPr sz="2100" b="1">
                 <a:solidFill>
                   <a:srgbClr val="17253A"/>
                 </a:solidFill>
@@ -8249,7 +8249,7 @@
               </a:defRPr>
             </a:pPr>
             <a:r>
-              <a:rPr sz="2175" b="1">
+              <a:rPr sz="2100" b="1">
                 <a:solidFill>
                   <a:srgbClr val="17253A"/>
                 </a:solidFill>
@@ -8267,28 +8267,30 @@
           <p:cNvPr id="11" name="">
             <a:extLst xmlns:a="http://schemas.openxmlformats.org/drawingml/2006/main">
               <a:ext uri="{FF2B5EF4-FFF2-40B4-BE49-F238E27FC236}">
-                <a16:creationId xmlns:a16="http://schemas.microsoft.com/office/drawing/2014/main" id="{6D4E3D30-0D5C-4937-B8EB-10DDC9A79D5E}"/>
-              </a:ext>
-            </a:extLst>
-          </p:cNvPr>
-          <p:cNvSpPr>
-            <a:spLocks xmlns:a="http://schemas.openxmlformats.org/drawingml/2006/main" noGrp="1"/>
-          </p:cNvSpPr>
-          <p:nvPr/>
-        </p:nvSpPr>
-        <p:spPr>
-          <a:xfrm xmlns:a="http://schemas.openxmlformats.org/drawingml/2006/main">
-            <a:off x="1000125" y="2247900"/>
-            <a:ext cx="476250" cy="476250"/>
-          </a:xfrm>
-          <a:prstGeom xmlns:a="http://schemas.openxmlformats.org/drawingml/2006/main" prst="ellipse">
+                <a16:creationId xmlns:a16="http://schemas.microsoft.com/office/drawing/2014/main" id="{ABA46384-CF57-4AB9-A0D7-631EFF09034A}"/>
+              </a:ext>
+            </a:extLst>
+          </p:cNvPr>
+          <p:cNvSpPr>
+            <a:spLocks xmlns:a="http://schemas.openxmlformats.org/drawingml/2006/main" noGrp="1"/>
+          </p:cNvSpPr>
+          <p:nvPr/>
+        </p:nvSpPr>
+        <p:spPr>
+          <a:xfrm xmlns:a="http://schemas.openxmlformats.org/drawingml/2006/main">
+            <a:off x="971550" y="2124075"/>
+            <a:ext cx="38100" cy="3524250"/>
+          </a:xfrm>
+          <a:prstGeom xmlns:a="http://schemas.openxmlformats.org/drawingml/2006/main" prst="rect">
             <a:avLst/>
           </a:prstGeom>
           <a:solidFill xmlns:a="http://schemas.openxmlformats.org/drawingml/2006/main">
-            <a:srgbClr val="18324A"/>
+            <a:srgbClr val="2C6E73"/>
           </a:solidFill>
           <a:ln xmlns:a="http://schemas.openxmlformats.org/drawingml/2006/main" w="0">
-            <a:noFill/>
+            <a:solidFill>
+              <a:srgbClr val="2C6E73"/>
+            </a:solidFill>
           </a:ln>
         </p:spPr>
       </p:sp>
@@ -8297,19 +8299,19 @@
           <p:cNvPr id="12" name="">
             <a:extLst xmlns:a="http://schemas.openxmlformats.org/drawingml/2006/main">
               <a:ext uri="{FF2B5EF4-FFF2-40B4-BE49-F238E27FC236}">
-                <a16:creationId xmlns:a16="http://schemas.microsoft.com/office/drawing/2014/main" id="{86050579-F843-4739-8A75-4AEE5AD1340B}"/>
-              </a:ext>
-            </a:extLst>
-          </p:cNvPr>
-          <p:cNvSpPr>
-            <a:spLocks xmlns:a="http://schemas.openxmlformats.org/drawingml/2006/main" noGrp="1"/>
-          </p:cNvSpPr>
-          <p:nvPr/>
-        </p:nvSpPr>
-        <p:spPr>
-          <a:xfrm xmlns:a="http://schemas.openxmlformats.org/drawingml/2006/main">
-            <a:off x="1000125" y="2276475"/>
-            <a:ext cx="476250" cy="419100"/>
+                <a16:creationId xmlns:a16="http://schemas.microsoft.com/office/drawing/2014/main" id="{F1FE3687-C3F3-4795-AFF1-F28A92B3002A}"/>
+              </a:ext>
+            </a:extLst>
+          </p:cNvPr>
+          <p:cNvSpPr>
+            <a:spLocks xmlns:a="http://schemas.openxmlformats.org/drawingml/2006/main" noGrp="1"/>
+          </p:cNvSpPr>
+          <p:nvPr/>
+        </p:nvSpPr>
+        <p:spPr>
+          <a:xfrm xmlns:a="http://schemas.openxmlformats.org/drawingml/2006/main">
+            <a:off x="1162050" y="2200275"/>
+            <a:ext cx="400050" cy="400050"/>
           </a:xfrm>
           <a:prstGeom xmlns:a="http://schemas.openxmlformats.org/drawingml/2006/main" prst="rect">
             <a:avLst/>
@@ -8326,9 +8328,9 @@
           <a:lstStyle xmlns:a="http://schemas.openxmlformats.org/drawingml/2006/main"/>
           <a:p xmlns:a="http://schemas.openxmlformats.org/drawingml/2006/main">
             <a:pPr algn="ctr">
-              <a:defRPr sz="1350" b="1">
-                <a:solidFill>
-                  <a:srgbClr val="FFFFFF"/>
+              <a:defRPr sz="1125" b="1">
+                <a:solidFill>
+                  <a:srgbClr val="2C6E73"/>
                 </a:solidFill>
                 <a:latin typeface="Arial"/>
                 <a:ea typeface="Arial"/>
@@ -8336,9 +8338,9 @@
               </a:defRPr>
             </a:pPr>
             <a:r>
-              <a:rPr sz="1350" b="1">
-                <a:solidFill>
-                  <a:srgbClr val="FFFFFF"/>
+              <a:rPr sz="1125" b="1">
+                <a:solidFill>
+                  <a:srgbClr val="2C6E73"/>
                 </a:solidFill>
                 <a:latin typeface="Arial"/>
                 <a:ea typeface="Arial"/>
@@ -8354,19 +8356,19 @@
           <p:cNvPr id="13" name="">
             <a:extLst xmlns:a="http://schemas.openxmlformats.org/drawingml/2006/main">
               <a:ext uri="{FF2B5EF4-FFF2-40B4-BE49-F238E27FC236}">
-                <a16:creationId xmlns:a16="http://schemas.microsoft.com/office/drawing/2014/main" id="{8D7BFAED-B33A-476B-8085-3E142C241996}"/>
-              </a:ext>
-            </a:extLst>
-          </p:cNvPr>
-          <p:cNvSpPr>
-            <a:spLocks xmlns:a="http://schemas.openxmlformats.org/drawingml/2006/main" noGrp="1"/>
-          </p:cNvSpPr>
-          <p:nvPr/>
-        </p:nvSpPr>
-        <p:spPr>
-          <a:xfrm xmlns:a="http://schemas.openxmlformats.org/drawingml/2006/main">
-            <a:off x="1714500" y="2181225"/>
-            <a:ext cx="9429750" cy="609600"/>
+                <a16:creationId xmlns:a16="http://schemas.microsoft.com/office/drawing/2014/main" id="{51C0636B-4E63-4490-A3B6-28DE0A594D41}"/>
+              </a:ext>
+            </a:extLst>
+          </p:cNvPr>
+          <p:cNvSpPr>
+            <a:spLocks xmlns:a="http://schemas.openxmlformats.org/drawingml/2006/main" noGrp="1"/>
+          </p:cNvSpPr>
+          <p:nvPr/>
+        </p:nvSpPr>
+        <p:spPr>
+          <a:xfrm xmlns:a="http://schemas.openxmlformats.org/drawingml/2006/main">
+            <a:off x="1714500" y="2114550"/>
+            <a:ext cx="9525000" cy="809625"/>
           </a:xfrm>
           <a:prstGeom xmlns:a="http://schemas.openxmlformats.org/drawingml/2006/main" prst="rect">
             <a:avLst/>
@@ -8383,7 +8385,7 @@
           <a:lstStyle xmlns:a="http://schemas.openxmlformats.org/drawingml/2006/main"/>
           <a:p xmlns:a="http://schemas.openxmlformats.org/drawingml/2006/main">
             <a:pPr algn="l">
-              <a:defRPr sz="1500" b="0">
+              <a:defRPr sz="1725" b="0">
                 <a:solidFill>
                   <a:srgbClr val="17253A"/>
                 </a:solidFill>
@@ -8393,7 +8395,7 @@
               </a:defRPr>
             </a:pPr>
             <a:r>
-              <a:rPr sz="1500" b="0">
+              <a:rPr sz="1725" b="0">
                 <a:solidFill>
                   <a:srgbClr val="17253A"/>
                 </a:solidFill>
@@ -8401,7 +8403,7 @@
                 <a:ea typeface="Arial"/>
                 <a:cs typeface="Arial"/>
               </a:rPr>
-              <a:t>Identify the structure: Read the whole problem and mark the question and useful information.</a:t>
+              <a:t>18 cases × £76</a:t>
             </a:r>
           </a:p>
         </p:txBody>
@@ -8411,28 +8413,30 @@
           <p:cNvPr id="14" name="">
             <a:extLst xmlns:a="http://schemas.openxmlformats.org/drawingml/2006/main">
               <a:ext uri="{FF2B5EF4-FFF2-40B4-BE49-F238E27FC236}">
-                <a16:creationId xmlns:a16="http://schemas.microsoft.com/office/drawing/2014/main" id="{A29A51EA-689C-4796-8CAA-F72CF3DF4F9E}"/>
-              </a:ext>
-            </a:extLst>
-          </p:cNvPr>
-          <p:cNvSpPr>
-            <a:spLocks xmlns:a="http://schemas.openxmlformats.org/drawingml/2006/main" noGrp="1"/>
-          </p:cNvSpPr>
-          <p:nvPr/>
-        </p:nvSpPr>
-        <p:spPr>
-          <a:xfrm xmlns:a="http://schemas.openxmlformats.org/drawingml/2006/main">
-            <a:off x="1000125" y="2990850"/>
-            <a:ext cx="476250" cy="476250"/>
-          </a:xfrm>
-          <a:prstGeom xmlns:a="http://schemas.openxmlformats.org/drawingml/2006/main" prst="ellipse">
+                <a16:creationId xmlns:a16="http://schemas.microsoft.com/office/drawing/2014/main" id="{AE86D56D-2B42-4C63-9702-70AECE232D86}"/>
+              </a:ext>
+            </a:extLst>
+          </p:cNvPr>
+          <p:cNvSpPr>
+            <a:spLocks xmlns:a="http://schemas.openxmlformats.org/drawingml/2006/main" noGrp="1"/>
+          </p:cNvSpPr>
+          <p:nvPr/>
+        </p:nvSpPr>
+        <p:spPr>
+          <a:xfrm xmlns:a="http://schemas.openxmlformats.org/drawingml/2006/main">
+            <a:off x="1714500" y="2943225"/>
+            <a:ext cx="9334500" cy="9525"/>
+          </a:xfrm>
+          <a:prstGeom xmlns:a="http://schemas.openxmlformats.org/drawingml/2006/main" prst="rect">
             <a:avLst/>
           </a:prstGeom>
           <a:solidFill xmlns:a="http://schemas.openxmlformats.org/drawingml/2006/main">
-            <a:srgbClr val="2C6E73"/>
+            <a:srgbClr val="D9E0E6"/>
           </a:solidFill>
           <a:ln xmlns:a="http://schemas.openxmlformats.org/drawingml/2006/main" w="0">
-            <a:noFill/>
+            <a:solidFill>
+              <a:srgbClr val="D9E0E6"/>
+            </a:solidFill>
           </a:ln>
         </p:spPr>
       </p:sp>
@@ -8441,19 +8445,19 @@
           <p:cNvPr id="15" name="">
             <a:extLst xmlns:a="http://schemas.openxmlformats.org/drawingml/2006/main">
               <a:ext uri="{FF2B5EF4-FFF2-40B4-BE49-F238E27FC236}">
-                <a16:creationId xmlns:a16="http://schemas.microsoft.com/office/drawing/2014/main" id="{7B62280A-CFDB-404E-9174-46D1881BB2A5}"/>
-              </a:ext>
-            </a:extLst>
-          </p:cNvPr>
-          <p:cNvSpPr>
-            <a:spLocks xmlns:a="http://schemas.openxmlformats.org/drawingml/2006/main" noGrp="1"/>
-          </p:cNvSpPr>
-          <p:nvPr/>
-        </p:nvSpPr>
-        <p:spPr>
-          <a:xfrm xmlns:a="http://schemas.openxmlformats.org/drawingml/2006/main">
-            <a:off x="1000125" y="3019425"/>
-            <a:ext cx="476250" cy="419100"/>
+                <a16:creationId xmlns:a16="http://schemas.microsoft.com/office/drawing/2014/main" id="{68D587D9-C16B-471E-9AA5-E7DC4BF06E55}"/>
+              </a:ext>
+            </a:extLst>
+          </p:cNvPr>
+          <p:cNvSpPr>
+            <a:spLocks xmlns:a="http://schemas.openxmlformats.org/drawingml/2006/main" noGrp="1"/>
+          </p:cNvSpPr>
+          <p:nvPr/>
+        </p:nvSpPr>
+        <p:spPr>
+          <a:xfrm xmlns:a="http://schemas.openxmlformats.org/drawingml/2006/main">
+            <a:off x="1162050" y="3076575"/>
+            <a:ext cx="400050" cy="400050"/>
           </a:xfrm>
           <a:prstGeom xmlns:a="http://schemas.openxmlformats.org/drawingml/2006/main" prst="rect">
             <a:avLst/>
@@ -8470,9 +8474,9 @@
           <a:lstStyle xmlns:a="http://schemas.openxmlformats.org/drawingml/2006/main"/>
           <a:p xmlns:a="http://schemas.openxmlformats.org/drawingml/2006/main">
             <a:pPr algn="ctr">
-              <a:defRPr sz="1350" b="1">
-                <a:solidFill>
-                  <a:srgbClr val="FFFFFF"/>
+              <a:defRPr sz="1125" b="1">
+                <a:solidFill>
+                  <a:srgbClr val="2C6E73"/>
                 </a:solidFill>
                 <a:latin typeface="Arial"/>
                 <a:ea typeface="Arial"/>
@@ -8480,9 +8484,9 @@
               </a:defRPr>
             </a:pPr>
             <a:r>
-              <a:rPr sz="1350" b="1">
-                <a:solidFill>
-                  <a:srgbClr val="FFFFFF"/>
+              <a:rPr sz="1125" b="1">
+                <a:solidFill>
+                  <a:srgbClr val="2C6E73"/>
                 </a:solidFill>
                 <a:latin typeface="Arial"/>
                 <a:ea typeface="Arial"/>
@@ -8498,19 +8502,19 @@
           <p:cNvPr id="16" name="">
             <a:extLst xmlns:a="http://schemas.openxmlformats.org/drawingml/2006/main">
               <a:ext uri="{FF2B5EF4-FFF2-40B4-BE49-F238E27FC236}">
-                <a16:creationId xmlns:a16="http://schemas.microsoft.com/office/drawing/2014/main" id="{3E20F2DE-7D34-46A4-BD12-97F314424225}"/>
-              </a:ext>
-            </a:extLst>
-          </p:cNvPr>
-          <p:cNvSpPr>
-            <a:spLocks xmlns:a="http://schemas.openxmlformats.org/drawingml/2006/main" noGrp="1"/>
-          </p:cNvSpPr>
-          <p:nvPr/>
-        </p:nvSpPr>
-        <p:spPr>
-          <a:xfrm xmlns:a="http://schemas.openxmlformats.org/drawingml/2006/main">
-            <a:off x="1714500" y="2924175"/>
-            <a:ext cx="9429750" cy="609600"/>
+                <a16:creationId xmlns:a16="http://schemas.microsoft.com/office/drawing/2014/main" id="{D4071493-5F23-4A4B-8918-C7769B0CB660}"/>
+              </a:ext>
+            </a:extLst>
+          </p:cNvPr>
+          <p:cNvSpPr>
+            <a:spLocks xmlns:a="http://schemas.openxmlformats.org/drawingml/2006/main" noGrp="1"/>
+          </p:cNvSpPr>
+          <p:nvPr/>
+        </p:nvSpPr>
+        <p:spPr>
+          <a:xfrm xmlns:a="http://schemas.openxmlformats.org/drawingml/2006/main">
+            <a:off x="1714500" y="2990850"/>
+            <a:ext cx="9525000" cy="809625"/>
           </a:xfrm>
           <a:prstGeom xmlns:a="http://schemas.openxmlformats.org/drawingml/2006/main" prst="rect">
             <a:avLst/>
@@ -8527,7 +8531,7 @@
           <a:lstStyle xmlns:a="http://schemas.openxmlformats.org/drawingml/2006/main"/>
           <a:p xmlns:a="http://schemas.openxmlformats.org/drawingml/2006/main">
             <a:pPr algn="l">
-              <a:defRPr sz="1500" b="0">
+              <a:defRPr sz="1725" b="0">
                 <a:solidFill>
                   <a:srgbClr val="17253A"/>
                 </a:solidFill>
@@ -8537,7 +8541,7 @@
               </a:defRPr>
             </a:pPr>
             <a:r>
-              <a:rPr sz="1500" b="0">
+              <a:rPr sz="1725" b="0">
                 <a:solidFill>
                   <a:srgbClr val="17253A"/>
                 </a:solidFill>
@@ -8545,7 +8549,7 @@
                 <a:ea typeface="Arial"/>
                 <a:cs typeface="Arial"/>
               </a:rPr>
-              <a:t>Set up the method: Plan the operations in order before calculating.</a:t>
+              <a:t>18 × £76 = £1,368</a:t>
             </a:r>
           </a:p>
         </p:txBody>
@@ -8555,28 +8559,30 @@
           <p:cNvPr id="17" name="">
             <a:extLst xmlns:a="http://schemas.openxmlformats.org/drawingml/2006/main">
               <a:ext uri="{FF2B5EF4-FFF2-40B4-BE49-F238E27FC236}">
-                <a16:creationId xmlns:a16="http://schemas.microsoft.com/office/drawing/2014/main" id="{AE76754A-8B71-47EB-834C-DA7639E44BE1}"/>
-              </a:ext>
-            </a:extLst>
-          </p:cNvPr>
-          <p:cNvSpPr>
-            <a:spLocks xmlns:a="http://schemas.openxmlformats.org/drawingml/2006/main" noGrp="1"/>
-          </p:cNvSpPr>
-          <p:nvPr/>
-        </p:nvSpPr>
-        <p:spPr>
-          <a:xfrm xmlns:a="http://schemas.openxmlformats.org/drawingml/2006/main">
-            <a:off x="1000125" y="3733800"/>
-            <a:ext cx="476250" cy="476250"/>
-          </a:xfrm>
-          <a:prstGeom xmlns:a="http://schemas.openxmlformats.org/drawingml/2006/main" prst="ellipse">
+                <a16:creationId xmlns:a16="http://schemas.microsoft.com/office/drawing/2014/main" id="{6EC68419-46B4-4120-987B-91A4B47E77E1}"/>
+              </a:ext>
+            </a:extLst>
+          </p:cNvPr>
+          <p:cNvSpPr>
+            <a:spLocks xmlns:a="http://schemas.openxmlformats.org/drawingml/2006/main" noGrp="1"/>
+          </p:cNvSpPr>
+          <p:nvPr/>
+        </p:nvSpPr>
+        <p:spPr>
+          <a:xfrm xmlns:a="http://schemas.openxmlformats.org/drawingml/2006/main">
+            <a:off x="1714500" y="3819525"/>
+            <a:ext cx="9334500" cy="9525"/>
+          </a:xfrm>
+          <a:prstGeom xmlns:a="http://schemas.openxmlformats.org/drawingml/2006/main" prst="rect">
             <a:avLst/>
           </a:prstGeom>
           <a:solidFill xmlns:a="http://schemas.openxmlformats.org/drawingml/2006/main">
-            <a:srgbClr val="2C6E73"/>
+            <a:srgbClr val="D9E0E6"/>
           </a:solidFill>
           <a:ln xmlns:a="http://schemas.openxmlformats.org/drawingml/2006/main" w="0">
-            <a:noFill/>
+            <a:solidFill>
+              <a:srgbClr val="D9E0E6"/>
+            </a:solidFill>
           </a:ln>
         </p:spPr>
       </p:sp>
@@ -8585,19 +8591,19 @@
           <p:cNvPr id="18" name="">
             <a:extLst xmlns:a="http://schemas.openxmlformats.org/drawingml/2006/main">
               <a:ext uri="{FF2B5EF4-FFF2-40B4-BE49-F238E27FC236}">
-                <a16:creationId xmlns:a16="http://schemas.microsoft.com/office/drawing/2014/main" id="{67AA9589-8603-41AE-B152-486FE35A157C}"/>
-              </a:ext>
-            </a:extLst>
-          </p:cNvPr>
-          <p:cNvSpPr>
-            <a:spLocks xmlns:a="http://schemas.openxmlformats.org/drawingml/2006/main" noGrp="1"/>
-          </p:cNvSpPr>
-          <p:nvPr/>
-        </p:nvSpPr>
-        <p:spPr>
-          <a:xfrm xmlns:a="http://schemas.openxmlformats.org/drawingml/2006/main">
-            <a:off x="1000125" y="3762375"/>
-            <a:ext cx="476250" cy="419100"/>
+                <a16:creationId xmlns:a16="http://schemas.microsoft.com/office/drawing/2014/main" id="{FE9EB459-CBA7-4111-8972-843DCDD82257}"/>
+              </a:ext>
+            </a:extLst>
+          </p:cNvPr>
+          <p:cNvSpPr>
+            <a:spLocks xmlns:a="http://schemas.openxmlformats.org/drawingml/2006/main" noGrp="1"/>
+          </p:cNvSpPr>
+          <p:nvPr/>
+        </p:nvSpPr>
+        <p:spPr>
+          <a:xfrm xmlns:a="http://schemas.openxmlformats.org/drawingml/2006/main">
+            <a:off x="1162050" y="3952875"/>
+            <a:ext cx="400050" cy="400050"/>
           </a:xfrm>
           <a:prstGeom xmlns:a="http://schemas.openxmlformats.org/drawingml/2006/main" prst="rect">
             <a:avLst/>
@@ -8614,9 +8620,9 @@
           <a:lstStyle xmlns:a="http://schemas.openxmlformats.org/drawingml/2006/main"/>
           <a:p xmlns:a="http://schemas.openxmlformats.org/drawingml/2006/main">
             <a:pPr algn="ctr">
-              <a:defRPr sz="1350" b="1">
-                <a:solidFill>
-                  <a:srgbClr val="FFFFFF"/>
+              <a:defRPr sz="1125" b="1">
+                <a:solidFill>
+                  <a:srgbClr val="2C6E73"/>
                 </a:solidFill>
                 <a:latin typeface="Arial"/>
                 <a:ea typeface="Arial"/>
@@ -8624,9 +8630,9 @@
               </a:defRPr>
             </a:pPr>
             <a:r>
-              <a:rPr sz="1350" b="1">
-                <a:solidFill>
-                  <a:srgbClr val="FFFFFF"/>
+              <a:rPr sz="1125" b="1">
+                <a:solidFill>
+                  <a:srgbClr val="2C6E73"/>
                 </a:solidFill>
                 <a:latin typeface="Arial"/>
                 <a:ea typeface="Arial"/>
@@ -8642,19 +8648,19 @@
           <p:cNvPr id="19" name="">
             <a:extLst xmlns:a="http://schemas.openxmlformats.org/drawingml/2006/main">
               <a:ext uri="{FF2B5EF4-FFF2-40B4-BE49-F238E27FC236}">
-                <a16:creationId xmlns:a16="http://schemas.microsoft.com/office/drawing/2014/main" id="{65311D40-26E9-4AAC-A7B6-CE47FD4C475D}"/>
-              </a:ext>
-            </a:extLst>
-          </p:cNvPr>
-          <p:cNvSpPr>
-            <a:spLocks xmlns:a="http://schemas.openxmlformats.org/drawingml/2006/main" noGrp="1"/>
-          </p:cNvSpPr>
-          <p:nvPr/>
-        </p:nvSpPr>
-        <p:spPr>
-          <a:xfrm xmlns:a="http://schemas.openxmlformats.org/drawingml/2006/main">
-            <a:off x="1714500" y="3667125"/>
-            <a:ext cx="9429750" cy="609600"/>
+                <a16:creationId xmlns:a16="http://schemas.microsoft.com/office/drawing/2014/main" id="{D6E1D8F5-BFEB-4731-BC49-3F90F5C2A39A}"/>
+              </a:ext>
+            </a:extLst>
+          </p:cNvPr>
+          <p:cNvSpPr>
+            <a:spLocks xmlns:a="http://schemas.openxmlformats.org/drawingml/2006/main" noGrp="1"/>
+          </p:cNvSpPr>
+          <p:nvPr/>
+        </p:nvSpPr>
+        <p:spPr>
+          <a:xfrm xmlns:a="http://schemas.openxmlformats.org/drawingml/2006/main">
+            <a:off x="1714500" y="3867150"/>
+            <a:ext cx="9525000" cy="809625"/>
           </a:xfrm>
           <a:prstGeom xmlns:a="http://schemas.openxmlformats.org/drawingml/2006/main" prst="rect">
             <a:avLst/>
@@ -8671,7 +8677,7 @@
           <a:lstStyle xmlns:a="http://schemas.openxmlformats.org/drawingml/2006/main"/>
           <a:p xmlns:a="http://schemas.openxmlformats.org/drawingml/2006/main">
             <a:pPr algn="l">
-              <a:defRPr sz="1500" b="0">
+              <a:defRPr sz="1725" b="0">
                 <a:solidFill>
                   <a:srgbClr val="17253A"/>
                 </a:solidFill>
@@ -8681,7 +8687,7 @@
               </a:defRPr>
             </a:pPr>
             <a:r>
-              <a:rPr sz="1500" b="0">
+              <a:rPr sz="1725" b="0">
                 <a:solidFill>
                   <a:srgbClr val="17253A"/>
                 </a:solidFill>
@@ -8689,7 +8695,7 @@
                 <a:ea typeface="Arial"/>
                 <a:cs typeface="Arial"/>
               </a:rPr>
-              <a:t>Complete the calculation: £1,132.</a:t>
+              <a:t>£2,500 - £1,368</a:t>
             </a:r>
           </a:p>
         </p:txBody>
@@ -8699,28 +8705,30 @@
           <p:cNvPr id="20" name="">
             <a:extLst xmlns:a="http://schemas.openxmlformats.org/drawingml/2006/main">
               <a:ext uri="{FF2B5EF4-FFF2-40B4-BE49-F238E27FC236}">
-                <a16:creationId xmlns:a16="http://schemas.microsoft.com/office/drawing/2014/main" id="{DA8E21BA-C3F5-4EDF-9A9E-E7E7EF8301F5}"/>
-              </a:ext>
-            </a:extLst>
-          </p:cNvPr>
-          <p:cNvSpPr>
-            <a:spLocks xmlns:a="http://schemas.openxmlformats.org/drawingml/2006/main" noGrp="1"/>
-          </p:cNvSpPr>
-          <p:nvPr/>
-        </p:nvSpPr>
-        <p:spPr>
-          <a:xfrm xmlns:a="http://schemas.openxmlformats.org/drawingml/2006/main">
-            <a:off x="1000125" y="4476750"/>
-            <a:ext cx="476250" cy="476250"/>
-          </a:xfrm>
-          <a:prstGeom xmlns:a="http://schemas.openxmlformats.org/drawingml/2006/main" prst="ellipse">
+                <a16:creationId xmlns:a16="http://schemas.microsoft.com/office/drawing/2014/main" id="{4ADF6F03-FED6-40BD-8EC9-1937DDE6C2DC}"/>
+              </a:ext>
+            </a:extLst>
+          </p:cNvPr>
+          <p:cNvSpPr>
+            <a:spLocks xmlns:a="http://schemas.openxmlformats.org/drawingml/2006/main" noGrp="1"/>
+          </p:cNvSpPr>
+          <p:nvPr/>
+        </p:nvSpPr>
+        <p:spPr>
+          <a:xfrm xmlns:a="http://schemas.openxmlformats.org/drawingml/2006/main">
+            <a:off x="1714500" y="4695825"/>
+            <a:ext cx="9334500" cy="9525"/>
+          </a:xfrm>
+          <a:prstGeom xmlns:a="http://schemas.openxmlformats.org/drawingml/2006/main" prst="rect">
             <a:avLst/>
           </a:prstGeom>
           <a:solidFill xmlns:a="http://schemas.openxmlformats.org/drawingml/2006/main">
-            <a:srgbClr val="2C6E73"/>
+            <a:srgbClr val="D9E0E6"/>
           </a:solidFill>
           <a:ln xmlns:a="http://schemas.openxmlformats.org/drawingml/2006/main" w="0">
-            <a:noFill/>
+            <a:solidFill>
+              <a:srgbClr val="D9E0E6"/>
+            </a:solidFill>
           </a:ln>
         </p:spPr>
       </p:sp>
@@ -8729,19 +8737,19 @@
           <p:cNvPr id="21" name="">
             <a:extLst xmlns:a="http://schemas.openxmlformats.org/drawingml/2006/main">
               <a:ext uri="{FF2B5EF4-FFF2-40B4-BE49-F238E27FC236}">
-                <a16:creationId xmlns:a16="http://schemas.microsoft.com/office/drawing/2014/main" id="{283475BF-F920-4AF6-A841-B0ADB52CCDB9}"/>
-              </a:ext>
-            </a:extLst>
-          </p:cNvPr>
-          <p:cNvSpPr>
-            <a:spLocks xmlns:a="http://schemas.openxmlformats.org/drawingml/2006/main" noGrp="1"/>
-          </p:cNvSpPr>
-          <p:nvPr/>
-        </p:nvSpPr>
-        <p:spPr>
-          <a:xfrm xmlns:a="http://schemas.openxmlformats.org/drawingml/2006/main">
-            <a:off x="1000125" y="4505325"/>
-            <a:ext cx="476250" cy="419100"/>
+                <a16:creationId xmlns:a16="http://schemas.microsoft.com/office/drawing/2014/main" id="{821D0527-4BA1-4797-9EAC-BE514CDF85C5}"/>
+              </a:ext>
+            </a:extLst>
+          </p:cNvPr>
+          <p:cNvSpPr>
+            <a:spLocks xmlns:a="http://schemas.openxmlformats.org/drawingml/2006/main" noGrp="1"/>
+          </p:cNvSpPr>
+          <p:nvPr/>
+        </p:nvSpPr>
+        <p:spPr>
+          <a:xfrm xmlns:a="http://schemas.openxmlformats.org/drawingml/2006/main">
+            <a:off x="1162050" y="4829175"/>
+            <a:ext cx="400050" cy="400050"/>
           </a:xfrm>
           <a:prstGeom xmlns:a="http://schemas.openxmlformats.org/drawingml/2006/main" prst="rect">
             <a:avLst/>
@@ -8758,9 +8766,9 @@
           <a:lstStyle xmlns:a="http://schemas.openxmlformats.org/drawingml/2006/main"/>
           <a:p xmlns:a="http://schemas.openxmlformats.org/drawingml/2006/main">
             <a:pPr algn="ctr">
-              <a:defRPr sz="1350" b="1">
-                <a:solidFill>
-                  <a:srgbClr val="FFFFFF"/>
+              <a:defRPr sz="1125" b="1">
+                <a:solidFill>
+                  <a:srgbClr val="2F785D"/>
                 </a:solidFill>
                 <a:latin typeface="Arial"/>
                 <a:ea typeface="Arial"/>
@@ -8768,9 +8776,9 @@
               </a:defRPr>
             </a:pPr>
             <a:r>
-              <a:rPr sz="1350" b="1">
-                <a:solidFill>
-                  <a:srgbClr val="FFFFFF"/>
+              <a:rPr sz="1125" b="1">
+                <a:solidFill>
+                  <a:srgbClr val="2F785D"/>
                 </a:solidFill>
                 <a:latin typeface="Arial"/>
                 <a:ea typeface="Arial"/>
@@ -8786,19 +8794,19 @@
           <p:cNvPr id="22" name="">
             <a:extLst xmlns:a="http://schemas.openxmlformats.org/drawingml/2006/main">
               <a:ext uri="{FF2B5EF4-FFF2-40B4-BE49-F238E27FC236}">
-                <a16:creationId xmlns:a16="http://schemas.microsoft.com/office/drawing/2014/main" id="{4508924F-529F-4AF3-96C0-B9E37C6D4A1F}"/>
-              </a:ext>
-            </a:extLst>
-          </p:cNvPr>
-          <p:cNvSpPr>
-            <a:spLocks xmlns:a="http://schemas.openxmlformats.org/drawingml/2006/main" noGrp="1"/>
-          </p:cNvSpPr>
-          <p:nvPr/>
-        </p:nvSpPr>
-        <p:spPr>
-          <a:xfrm xmlns:a="http://schemas.openxmlformats.org/drawingml/2006/main">
-            <a:off x="1714500" y="4410075"/>
-            <a:ext cx="9429750" cy="609600"/>
+                <a16:creationId xmlns:a16="http://schemas.microsoft.com/office/drawing/2014/main" id="{00EAFC75-34A9-40CF-BB6F-B3C1D1A10CA1}"/>
+              </a:ext>
+            </a:extLst>
+          </p:cNvPr>
+          <p:cNvSpPr>
+            <a:spLocks xmlns:a="http://schemas.openxmlformats.org/drawingml/2006/main" noGrp="1"/>
+          </p:cNvSpPr>
+          <p:nvPr/>
+        </p:nvSpPr>
+        <p:spPr>
+          <a:xfrm xmlns:a="http://schemas.openxmlformats.org/drawingml/2006/main">
+            <a:off x="1714500" y="4743450"/>
+            <a:ext cx="9525000" cy="809625"/>
           </a:xfrm>
           <a:prstGeom xmlns:a="http://schemas.openxmlformats.org/drawingml/2006/main" prst="rect">
             <a:avLst/>
@@ -8815,7 +8823,7 @@
           <a:lstStyle xmlns:a="http://schemas.openxmlformats.org/drawingml/2006/main"/>
           <a:p xmlns:a="http://schemas.openxmlformats.org/drawingml/2006/main">
             <a:pPr algn="l">
-              <a:defRPr sz="1500" b="1">
+              <a:defRPr sz="1725" b="1">
                 <a:solidFill>
                   <a:srgbClr val="2F785D"/>
                 </a:solidFill>
@@ -8825,7 +8833,7 @@
               </a:defRPr>
             </a:pPr>
             <a:r>
-              <a:rPr sz="1500" b="1">
+              <a:rPr sz="1725" b="1">
                 <a:solidFill>
                   <a:srgbClr val="2F785D"/>
                 </a:solidFill>
@@ -8833,7 +8841,7 @@
                 <a:ea typeface="Arial"/>
                 <a:cs typeface="Arial"/>
               </a:rPr>
-              <a:t>Check the result: Complete each step, label sub-totals and check the final answer in context.</a:t>
+              <a:t>£1,132 remains</a:t>
             </a:r>
           </a:p>
         </p:txBody>
@@ -8841,7 +8849,7 @@
     </p:spTree>
     <p:extLst>
       <p:ext uri="{BB962C8B-B14F-4D97-AF65-F5344CB8AC3E}">
-        <p14:creationId xmlns:p14="http://schemas.microsoft.com/office/powerpoint/2010/main" val="836105080"/>
+        <p14:creationId xmlns:p14="http://schemas.microsoft.com/office/powerpoint/2010/main" val="2022941138"/>
       </p:ext>
     </p:extLst>
   </p:cSld>
@@ -9134,7 +9142,7 @@
           <p:cNvPr id="15" name="">
             <a:extLst xmlns:a="http://schemas.openxmlformats.org/drawingml/2006/main">
               <a:ext uri="{FF2B5EF4-FFF2-40B4-BE49-F238E27FC236}">
-                <a16:creationId xmlns:a16="http://schemas.microsoft.com/office/drawing/2014/main" id="{57E9B592-2A73-498D-B313-2B86063C11EB}"/>
+                <a16:creationId xmlns:a16="http://schemas.microsoft.com/office/drawing/2014/main" id="{BF3645AF-AC75-497E-8FFB-337762ED258D}"/>
               </a:ext>
             </a:extLst>
           </p:cNvPr>
@@ -9166,7 +9174,7 @@
           <p:cNvPr id="2" name="">
             <a:extLst xmlns:a="http://schemas.openxmlformats.org/drawingml/2006/main">
               <a:ext uri="{FF2B5EF4-FFF2-40B4-BE49-F238E27FC236}">
-                <a16:creationId xmlns:a16="http://schemas.microsoft.com/office/drawing/2014/main" id="{02763DAE-CAC3-4DD1-95B4-11C3E35CAA3B}"/>
+                <a16:creationId xmlns:a16="http://schemas.microsoft.com/office/drawing/2014/main" id="{068EF982-9D24-4E5B-ADD4-36C98589485D}"/>
               </a:ext>
             </a:extLst>
           </p:cNvPr>
@@ -9223,7 +9231,7 @@
           <p:cNvPr id="3" name="">
             <a:extLst xmlns:a="http://schemas.openxmlformats.org/drawingml/2006/main">
               <a:ext uri="{FF2B5EF4-FFF2-40B4-BE49-F238E27FC236}">
-                <a16:creationId xmlns:a16="http://schemas.microsoft.com/office/drawing/2014/main" id="{3018E2E2-44B5-4711-9DED-3C38BFCD25F7}"/>
+                <a16:creationId xmlns:a16="http://schemas.microsoft.com/office/drawing/2014/main" id="{9993777A-6FC0-44AB-AF91-F23F4CB0E83B}"/>
               </a:ext>
             </a:extLst>
           </p:cNvPr>
@@ -9255,7 +9263,7 @@
           <p:cNvPr id="4" name="">
             <a:extLst xmlns:a="http://schemas.openxmlformats.org/drawingml/2006/main">
               <a:ext uri="{FF2B5EF4-FFF2-40B4-BE49-F238E27FC236}">
-                <a16:creationId xmlns:a16="http://schemas.microsoft.com/office/drawing/2014/main" id="{2E9BF71A-CD95-4DAA-AD24-2F4CC2D73E5F}"/>
+                <a16:creationId xmlns:a16="http://schemas.microsoft.com/office/drawing/2014/main" id="{B8ED94B6-4064-4D1A-96E1-C7F0DE24B074}"/>
               </a:ext>
             </a:extLst>
           </p:cNvPr>
@@ -9312,7 +9320,7 @@
           <p:cNvPr id="5" name="">
             <a:extLst xmlns:a="http://schemas.openxmlformats.org/drawingml/2006/main">
               <a:ext uri="{FF2B5EF4-FFF2-40B4-BE49-F238E27FC236}">
-                <a16:creationId xmlns:a16="http://schemas.microsoft.com/office/drawing/2014/main" id="{47154B98-3B5A-4E47-AF14-26CFA50C5243}"/>
+                <a16:creationId xmlns:a16="http://schemas.microsoft.com/office/drawing/2014/main" id="{B90511F0-71B0-47BA-B9C2-A7EE35904A8E}"/>
               </a:ext>
             </a:extLst>
           </p:cNvPr>
@@ -9369,7 +9377,7 @@
           <p:cNvPr id="6" name="">
             <a:extLst xmlns:a="http://schemas.openxmlformats.org/drawingml/2006/main">
               <a:ext uri="{FF2B5EF4-FFF2-40B4-BE49-F238E27FC236}">
-                <a16:creationId xmlns:a16="http://schemas.microsoft.com/office/drawing/2014/main" id="{FD0B4F97-D447-4032-A34E-ACAC96783A76}"/>
+                <a16:creationId xmlns:a16="http://schemas.microsoft.com/office/drawing/2014/main" id="{910730B1-28B4-4A73-B894-7F400A03B933}"/>
               </a:ext>
             </a:extLst>
           </p:cNvPr>
@@ -9426,7 +9434,7 @@
           <p:cNvPr id="7" name="">
             <a:extLst xmlns:a="http://schemas.openxmlformats.org/drawingml/2006/main">
               <a:ext uri="{FF2B5EF4-FFF2-40B4-BE49-F238E27FC236}">
-                <a16:creationId xmlns:a16="http://schemas.microsoft.com/office/drawing/2014/main" id="{1DEB84A9-9E3C-491B-B4BC-86257410287F}"/>
+                <a16:creationId xmlns:a16="http://schemas.microsoft.com/office/drawing/2014/main" id="{BD9B9C22-47AC-4F65-B1D4-38BC1F17DBD9}"/>
               </a:ext>
             </a:extLst>
           </p:cNvPr>
@@ -9458,7 +9466,7 @@
           <p:cNvPr id="8" name="">
             <a:extLst xmlns:a="http://schemas.openxmlformats.org/drawingml/2006/main">
               <a:ext uri="{FF2B5EF4-FFF2-40B4-BE49-F238E27FC236}">
-                <a16:creationId xmlns:a16="http://schemas.microsoft.com/office/drawing/2014/main" id="{EFE56443-D798-4B8A-A458-C8CFFF129883}"/>
+                <a16:creationId xmlns:a16="http://schemas.microsoft.com/office/drawing/2014/main" id="{EE067B09-0E7D-4600-944E-93B6863B93E8}"/>
               </a:ext>
             </a:extLst>
           </p:cNvPr>
@@ -9515,7 +9523,7 @@
           <p:cNvPr id="9" name="">
             <a:extLst xmlns:a="http://schemas.openxmlformats.org/drawingml/2006/main">
               <a:ext uri="{FF2B5EF4-FFF2-40B4-BE49-F238E27FC236}">
-                <a16:creationId xmlns:a16="http://schemas.microsoft.com/office/drawing/2014/main" id="{9752E959-421A-4562-A5A2-CC0E0B86F137}"/>
+                <a16:creationId xmlns:a16="http://schemas.microsoft.com/office/drawing/2014/main" id="{F7392D1B-93E1-415F-8352-DA8B35AEE605}"/>
               </a:ext>
             </a:extLst>
           </p:cNvPr>
@@ -9572,7 +9580,7 @@
           <p:cNvPr id="10" name="">
             <a:extLst xmlns:a="http://schemas.openxmlformats.org/drawingml/2006/main">
               <a:ext uri="{FF2B5EF4-FFF2-40B4-BE49-F238E27FC236}">
-                <a16:creationId xmlns:a16="http://schemas.microsoft.com/office/drawing/2014/main" id="{E378BBC7-8B4D-4E18-8BA5-0C44A10E2E49}"/>
+                <a16:creationId xmlns:a16="http://schemas.microsoft.com/office/drawing/2014/main" id="{6D7C98A9-F035-47B0-8831-FAD38B6A34ED}"/>
               </a:ext>
             </a:extLst>
           </p:cNvPr>
@@ -9629,7 +9637,7 @@
           <p:cNvPr id="11" name="">
             <a:extLst xmlns:a="http://schemas.openxmlformats.org/drawingml/2006/main">
               <a:ext uri="{FF2B5EF4-FFF2-40B4-BE49-F238E27FC236}">
-                <a16:creationId xmlns:a16="http://schemas.microsoft.com/office/drawing/2014/main" id="{E7B5CE5C-58B3-4C78-A024-B57E24D9CE6E}"/>
+                <a16:creationId xmlns:a16="http://schemas.microsoft.com/office/drawing/2014/main" id="{4A992101-66D7-41BC-85AB-FB04EEDF2AEA}"/>
               </a:ext>
             </a:extLst>
           </p:cNvPr>
@@ -9686,7 +9694,7 @@
           <p:cNvPr id="12" name="">
             <a:extLst xmlns:a="http://schemas.openxmlformats.org/drawingml/2006/main">
               <a:ext uri="{FF2B5EF4-FFF2-40B4-BE49-F238E27FC236}">
-                <a16:creationId xmlns:a16="http://schemas.microsoft.com/office/drawing/2014/main" id="{1C89C1F9-0E70-4817-B6C5-4A583A94F1AC}"/>
+                <a16:creationId xmlns:a16="http://schemas.microsoft.com/office/drawing/2014/main" id="{9BDECF6E-824B-448D-AFA9-22FC64A0E390}"/>
               </a:ext>
             </a:extLst>
           </p:cNvPr>
@@ -9718,7 +9726,7 @@
           <p:cNvPr id="13" name="">
             <a:extLst xmlns:a="http://schemas.openxmlformats.org/drawingml/2006/main">
               <a:ext uri="{FF2B5EF4-FFF2-40B4-BE49-F238E27FC236}">
-                <a16:creationId xmlns:a16="http://schemas.microsoft.com/office/drawing/2014/main" id="{13E1AE1D-3DBC-476A-936B-BA5BDFA6EF66}"/>
+                <a16:creationId xmlns:a16="http://schemas.microsoft.com/office/drawing/2014/main" id="{6B8AD2DD-A403-4782-9E11-2E9B4F967727}"/>
               </a:ext>
             </a:extLst>
           </p:cNvPr>
@@ -9775,7 +9783,7 @@
           <p:cNvPr id="14" name="">
             <a:extLst xmlns:a="http://schemas.openxmlformats.org/drawingml/2006/main">
               <a:ext uri="{FF2B5EF4-FFF2-40B4-BE49-F238E27FC236}">
-                <a16:creationId xmlns:a16="http://schemas.microsoft.com/office/drawing/2014/main" id="{BE273B45-CF56-4132-85F0-EA1B10C4553F}"/>
+                <a16:creationId xmlns:a16="http://schemas.microsoft.com/office/drawing/2014/main" id="{48429DC3-2B48-47E9-8139-06211D3F7822}"/>
               </a:ext>
             </a:extLst>
           </p:cNvPr>
@@ -9830,7 +9838,7 @@
     </p:spTree>
     <p:extLst>
       <p:ext uri="{BB962C8B-B14F-4D97-AF65-F5344CB8AC3E}">
-        <p14:creationId xmlns:p14="http://schemas.microsoft.com/office/powerpoint/2010/main" val="494864285"/>
+        <p14:creationId xmlns:p14="http://schemas.microsoft.com/office/powerpoint/2010/main" val="403584911"/>
       </p:ext>
     </p:extLst>
   </p:cSld>
@@ -10031,7 +10039,7 @@
           <p:cNvPr id="16" name="">
             <a:extLst xmlns:a="http://schemas.openxmlformats.org/drawingml/2006/main">
               <a:ext uri="{FF2B5EF4-FFF2-40B4-BE49-F238E27FC236}">
-                <a16:creationId xmlns:a16="http://schemas.microsoft.com/office/drawing/2014/main" id="{3F3BB560-0624-4673-A7C8-CB1B5D496744}"/>
+                <a16:creationId xmlns:a16="http://schemas.microsoft.com/office/drawing/2014/main" id="{681BE9D4-A634-492C-A048-DF3EAE7C5C53}"/>
               </a:ext>
             </a:extLst>
           </p:cNvPr>
@@ -10063,7 +10071,7 @@
           <p:cNvPr id="2" name="">
             <a:extLst xmlns:a="http://schemas.openxmlformats.org/drawingml/2006/main">
               <a:ext uri="{FF2B5EF4-FFF2-40B4-BE49-F238E27FC236}">
-                <a16:creationId xmlns:a16="http://schemas.microsoft.com/office/drawing/2014/main" id="{25E39ACD-BB60-48DD-B709-3117AA67118E}"/>
+                <a16:creationId xmlns:a16="http://schemas.microsoft.com/office/drawing/2014/main" id="{0B1BA0C5-8FE9-467E-9D84-C51652C1E03B}"/>
               </a:ext>
             </a:extLst>
           </p:cNvPr>
@@ -10120,7 +10128,7 @@
           <p:cNvPr id="3" name="">
             <a:extLst xmlns:a="http://schemas.openxmlformats.org/drawingml/2006/main">
               <a:ext uri="{FF2B5EF4-FFF2-40B4-BE49-F238E27FC236}">
-                <a16:creationId xmlns:a16="http://schemas.microsoft.com/office/drawing/2014/main" id="{9BC745BD-17D0-42D8-AA42-6DCE98B3CD11}"/>
+                <a16:creationId xmlns:a16="http://schemas.microsoft.com/office/drawing/2014/main" id="{CA2785C9-B7B0-4AE4-91BB-0244669CFE84}"/>
               </a:ext>
             </a:extLst>
           </p:cNvPr>
@@ -10152,7 +10160,7 @@
           <p:cNvPr id="4" name="">
             <a:extLst xmlns:a="http://schemas.openxmlformats.org/drawingml/2006/main">
               <a:ext uri="{FF2B5EF4-FFF2-40B4-BE49-F238E27FC236}">
-                <a16:creationId xmlns:a16="http://schemas.microsoft.com/office/drawing/2014/main" id="{1D5AB751-6BA1-491C-9E6A-47C8644A19AC}"/>
+                <a16:creationId xmlns:a16="http://schemas.microsoft.com/office/drawing/2014/main" id="{3EEF41EE-509A-4A72-A46D-101E5F603A1D}"/>
               </a:ext>
             </a:extLst>
           </p:cNvPr>
@@ -10209,7 +10217,7 @@
           <p:cNvPr id="5" name="">
             <a:extLst xmlns:a="http://schemas.openxmlformats.org/drawingml/2006/main">
               <a:ext uri="{FF2B5EF4-FFF2-40B4-BE49-F238E27FC236}">
-                <a16:creationId xmlns:a16="http://schemas.microsoft.com/office/drawing/2014/main" id="{97E9F797-1B28-4C76-8609-5FECAD96AC08}"/>
+                <a16:creationId xmlns:a16="http://schemas.microsoft.com/office/drawing/2014/main" id="{E183655B-E469-4B5A-B306-A7EE0166752B}"/>
               </a:ext>
             </a:extLst>
           </p:cNvPr>
@@ -10266,7 +10274,7 @@
           <p:cNvPr id="6" name="">
             <a:extLst xmlns:a="http://schemas.openxmlformats.org/drawingml/2006/main">
               <a:ext uri="{FF2B5EF4-FFF2-40B4-BE49-F238E27FC236}">
-                <a16:creationId xmlns:a16="http://schemas.microsoft.com/office/drawing/2014/main" id="{3C39541E-6540-4F1B-A0AC-24E0F079326E}"/>
+                <a16:creationId xmlns:a16="http://schemas.microsoft.com/office/drawing/2014/main" id="{D15FEC14-C027-4EC9-B3C3-E735E11E2875}"/>
               </a:ext>
             </a:extLst>
           </p:cNvPr>
@@ -10323,7 +10331,7 @@
           <p:cNvPr id="7" name="">
             <a:extLst xmlns:a="http://schemas.openxmlformats.org/drawingml/2006/main">
               <a:ext uri="{FF2B5EF4-FFF2-40B4-BE49-F238E27FC236}">
-                <a16:creationId xmlns:a16="http://schemas.microsoft.com/office/drawing/2014/main" id="{64D089C9-CB36-42F4-B13A-4F223D0D8217}"/>
+                <a16:creationId xmlns:a16="http://schemas.microsoft.com/office/drawing/2014/main" id="{1A419F6A-FA2D-4E83-9922-1096DEA0C7CE}"/>
               </a:ext>
             </a:extLst>
           </p:cNvPr>
@@ -10355,7 +10363,7 @@
           <p:cNvPr id="8" name="">
             <a:extLst xmlns:a="http://schemas.openxmlformats.org/drawingml/2006/main">
               <a:ext uri="{FF2B5EF4-FFF2-40B4-BE49-F238E27FC236}">
-                <a16:creationId xmlns:a16="http://schemas.microsoft.com/office/drawing/2014/main" id="{FD9A970C-A661-451E-AB6F-B911F17D7D8C}"/>
+                <a16:creationId xmlns:a16="http://schemas.microsoft.com/office/drawing/2014/main" id="{D1206D7F-6FE1-4B43-ABC4-DB4A9C7B1AB4}"/>
               </a:ext>
             </a:extLst>
           </p:cNvPr>
@@ -10412,7 +10420,7 @@
           <p:cNvPr id="9" name="">
             <a:extLst xmlns:a="http://schemas.openxmlformats.org/drawingml/2006/main">
               <a:ext uri="{FF2B5EF4-FFF2-40B4-BE49-F238E27FC236}">
-                <a16:creationId xmlns:a16="http://schemas.microsoft.com/office/drawing/2014/main" id="{3428E2D5-F162-448A-A059-DFDBE068D84B}"/>
+                <a16:creationId xmlns:a16="http://schemas.microsoft.com/office/drawing/2014/main" id="{61B836BB-CD3C-4539-8A1C-F126A52F7925}"/>
               </a:ext>
             </a:extLst>
           </p:cNvPr>
@@ -10469,7 +10477,7 @@
           <p:cNvPr id="10" name="">
             <a:extLst xmlns:a="http://schemas.openxmlformats.org/drawingml/2006/main">
               <a:ext uri="{FF2B5EF4-FFF2-40B4-BE49-F238E27FC236}">
-                <a16:creationId xmlns:a16="http://schemas.microsoft.com/office/drawing/2014/main" id="{F846B100-FFD0-41EE-A4E5-87EE9C981388}"/>
+                <a16:creationId xmlns:a16="http://schemas.microsoft.com/office/drawing/2014/main" id="{A3837665-495C-4AF1-9BD3-7FBB69994E80}"/>
               </a:ext>
             </a:extLst>
           </p:cNvPr>
@@ -10526,7 +10534,7 @@
           <p:cNvPr id="11" name="">
             <a:extLst xmlns:a="http://schemas.openxmlformats.org/drawingml/2006/main">
               <a:ext uri="{FF2B5EF4-FFF2-40B4-BE49-F238E27FC236}">
-                <a16:creationId xmlns:a16="http://schemas.microsoft.com/office/drawing/2014/main" id="{F7B91564-638D-44CE-B2D5-CA04C84D0C08}"/>
+                <a16:creationId xmlns:a16="http://schemas.microsoft.com/office/drawing/2014/main" id="{A8FA1621-48FB-4653-8B67-1E02BF6A94F2}"/>
               </a:ext>
             </a:extLst>
           </p:cNvPr>
@@ -10583,7 +10591,7 @@
           <p:cNvPr id="12" name="">
             <a:extLst xmlns:a="http://schemas.openxmlformats.org/drawingml/2006/main">
               <a:ext uri="{FF2B5EF4-FFF2-40B4-BE49-F238E27FC236}">
-                <a16:creationId xmlns:a16="http://schemas.microsoft.com/office/drawing/2014/main" id="{7C581164-5B17-4DF6-8996-2848CBD68316}"/>
+                <a16:creationId xmlns:a16="http://schemas.microsoft.com/office/drawing/2014/main" id="{459C5552-23FE-4C12-8212-AA056D2A4A89}"/>
               </a:ext>
             </a:extLst>
           </p:cNvPr>
@@ -10640,7 +10648,7 @@
           <p:cNvPr id="13" name="">
             <a:extLst xmlns:a="http://schemas.openxmlformats.org/drawingml/2006/main">
               <a:ext uri="{FF2B5EF4-FFF2-40B4-BE49-F238E27FC236}">
-                <a16:creationId xmlns:a16="http://schemas.microsoft.com/office/drawing/2014/main" id="{F058CFFA-9A1B-4D97-874E-ACA23B0A1623}"/>
+                <a16:creationId xmlns:a16="http://schemas.microsoft.com/office/drawing/2014/main" id="{DC90645C-DDA1-47E0-8170-1D2D5BEBFF55}"/>
               </a:ext>
             </a:extLst>
           </p:cNvPr>
@@ -10697,7 +10705,7 @@
           <p:cNvPr id="14" name="">
             <a:extLst xmlns:a="http://schemas.openxmlformats.org/drawingml/2006/main">
               <a:ext uri="{FF2B5EF4-FFF2-40B4-BE49-F238E27FC236}">
-                <a16:creationId xmlns:a16="http://schemas.microsoft.com/office/drawing/2014/main" id="{402B43D5-C1C5-4BDA-B2BA-88F314648131}"/>
+                <a16:creationId xmlns:a16="http://schemas.microsoft.com/office/drawing/2014/main" id="{EA0953FD-7318-4C5C-BF74-80C9DA55A2A5}"/>
               </a:ext>
             </a:extLst>
           </p:cNvPr>
@@ -10754,7 +10762,7 @@
           <p:cNvPr id="15" name="">
             <a:extLst xmlns:a="http://schemas.openxmlformats.org/drawingml/2006/main">
               <a:ext uri="{FF2B5EF4-FFF2-40B4-BE49-F238E27FC236}">
-                <a16:creationId xmlns:a16="http://schemas.microsoft.com/office/drawing/2014/main" id="{1D1FEBA1-3187-4C58-BF41-BC397A262D0E}"/>
+                <a16:creationId xmlns:a16="http://schemas.microsoft.com/office/drawing/2014/main" id="{CE81B933-50AA-40F8-B6CB-52381CCF7696}"/>
               </a:ext>
             </a:extLst>
           </p:cNvPr>
@@ -10809,7 +10817,7 @@
     </p:spTree>
     <p:extLst>
       <p:ext uri="{BB962C8B-B14F-4D97-AF65-F5344CB8AC3E}">
-        <p14:creationId xmlns:p14="http://schemas.microsoft.com/office/powerpoint/2010/main" val="612913935"/>
+        <p14:creationId xmlns:p14="http://schemas.microsoft.com/office/powerpoint/2010/main" val="225857755"/>
       </p:ext>
     </p:extLst>
   </p:cSld>
@@ -10964,7 +10972,7 @@
           <p:cNvPr id="16" name="">
             <a:extLst xmlns:a="http://schemas.openxmlformats.org/drawingml/2006/main">
               <a:ext uri="{FF2B5EF4-FFF2-40B4-BE49-F238E27FC236}">
-                <a16:creationId xmlns:a16="http://schemas.microsoft.com/office/drawing/2014/main" id="{B60F9251-04AE-4FB0-AFD3-D6D6460EA12B}"/>
+                <a16:creationId xmlns:a16="http://schemas.microsoft.com/office/drawing/2014/main" id="{74D98BB3-ECFB-429E-AA5A-42D87E0A9F3A}"/>
               </a:ext>
             </a:extLst>
           </p:cNvPr>
@@ -10996,7 +11004,7 @@
           <p:cNvPr id="2" name="">
             <a:extLst xmlns:a="http://schemas.openxmlformats.org/drawingml/2006/main">
               <a:ext uri="{FF2B5EF4-FFF2-40B4-BE49-F238E27FC236}">
-                <a16:creationId xmlns:a16="http://schemas.microsoft.com/office/drawing/2014/main" id="{CB75AF4D-F95D-4F58-BFCF-8C2AA231E9A5}"/>
+                <a16:creationId xmlns:a16="http://schemas.microsoft.com/office/drawing/2014/main" id="{FF2A6485-D7F9-4121-9461-323AB184CA51}"/>
               </a:ext>
             </a:extLst>
           </p:cNvPr>
@@ -11053,7 +11061,7 @@
           <p:cNvPr id="3" name="">
             <a:extLst xmlns:a="http://schemas.openxmlformats.org/drawingml/2006/main">
               <a:ext uri="{FF2B5EF4-FFF2-40B4-BE49-F238E27FC236}">
-                <a16:creationId xmlns:a16="http://schemas.microsoft.com/office/drawing/2014/main" id="{1204BF33-D1B3-45C4-832D-918D0D36164C}"/>
+                <a16:creationId xmlns:a16="http://schemas.microsoft.com/office/drawing/2014/main" id="{1675F363-5079-467F-87B4-2B99500BD294}"/>
               </a:ext>
             </a:extLst>
           </p:cNvPr>
@@ -11085,7 +11093,7 @@
           <p:cNvPr id="4" name="">
             <a:extLst xmlns:a="http://schemas.openxmlformats.org/drawingml/2006/main">
               <a:ext uri="{FF2B5EF4-FFF2-40B4-BE49-F238E27FC236}">
-                <a16:creationId xmlns:a16="http://schemas.microsoft.com/office/drawing/2014/main" id="{FB41C290-F115-434A-A49F-CFEA8065FC0D}"/>
+                <a16:creationId xmlns:a16="http://schemas.microsoft.com/office/drawing/2014/main" id="{61C0D316-23AD-460B-8CB8-657C19CFE1A2}"/>
               </a:ext>
             </a:extLst>
           </p:cNvPr>
@@ -11142,7 +11150,7 @@
           <p:cNvPr id="5" name="">
             <a:extLst xmlns:a="http://schemas.openxmlformats.org/drawingml/2006/main">
               <a:ext uri="{FF2B5EF4-FFF2-40B4-BE49-F238E27FC236}">
-                <a16:creationId xmlns:a16="http://schemas.microsoft.com/office/drawing/2014/main" id="{AD4D0E2C-CE4C-4E85-838C-56D89D347802}"/>
+                <a16:creationId xmlns:a16="http://schemas.microsoft.com/office/drawing/2014/main" id="{F86E613F-D9C3-4622-8B79-CDDA29E85469}"/>
               </a:ext>
             </a:extLst>
           </p:cNvPr>
@@ -11199,7 +11207,7 @@
           <p:cNvPr id="6" name="">
             <a:extLst xmlns:a="http://schemas.openxmlformats.org/drawingml/2006/main">
               <a:ext uri="{FF2B5EF4-FFF2-40B4-BE49-F238E27FC236}">
-                <a16:creationId xmlns:a16="http://schemas.microsoft.com/office/drawing/2014/main" id="{D4624B31-25C4-45F8-8484-56AC21889FD9}"/>
+                <a16:creationId xmlns:a16="http://schemas.microsoft.com/office/drawing/2014/main" id="{849AD4F2-1AB6-47B7-B7EF-2D15C0BC1EFA}"/>
               </a:ext>
             </a:extLst>
           </p:cNvPr>
@@ -11256,7 +11264,7 @@
           <p:cNvPr id="7" name="">
             <a:extLst xmlns:a="http://schemas.openxmlformats.org/drawingml/2006/main">
               <a:ext uri="{FF2B5EF4-FFF2-40B4-BE49-F238E27FC236}">
-                <a16:creationId xmlns:a16="http://schemas.microsoft.com/office/drawing/2014/main" id="{62531383-A617-4D7B-942F-8582461E5507}"/>
+                <a16:creationId xmlns:a16="http://schemas.microsoft.com/office/drawing/2014/main" id="{46A128B2-822A-47E2-8DAC-5625506E016D}"/>
               </a:ext>
             </a:extLst>
           </p:cNvPr>
@@ -11288,7 +11296,7 @@
           <p:cNvPr id="8" name="">
             <a:extLst xmlns:a="http://schemas.openxmlformats.org/drawingml/2006/main">
               <a:ext uri="{FF2B5EF4-FFF2-40B4-BE49-F238E27FC236}">
-                <a16:creationId xmlns:a16="http://schemas.microsoft.com/office/drawing/2014/main" id="{3F5E0BDD-8696-47BC-89C6-4A00CB0F984B}"/>
+                <a16:creationId xmlns:a16="http://schemas.microsoft.com/office/drawing/2014/main" id="{8094DF32-863A-4E0F-9FD1-2115613A0787}"/>
               </a:ext>
             </a:extLst>
           </p:cNvPr>
@@ -11345,7 +11353,7 @@
           <p:cNvPr id="9" name="">
             <a:extLst xmlns:a="http://schemas.openxmlformats.org/drawingml/2006/main">
               <a:ext uri="{FF2B5EF4-FFF2-40B4-BE49-F238E27FC236}">
-                <a16:creationId xmlns:a16="http://schemas.microsoft.com/office/drawing/2014/main" id="{B64D683B-01CD-4DB1-8B58-5E4888F650AE}"/>
+                <a16:creationId xmlns:a16="http://schemas.microsoft.com/office/drawing/2014/main" id="{8826B96E-AE93-45F8-9008-7A1B1A55E14E}"/>
               </a:ext>
             </a:extLst>
           </p:cNvPr>
@@ -11406,7 +11414,7 @@
           <p:nvPr/>
         </p:nvPicPr>
         <p:blipFill>
-          <a:blip xmlns:r="http://schemas.openxmlformats.org/officeDocument/2006/relationships" xmlns:a="http://schemas.openxmlformats.org/drawingml/2006/main" r:embed="Radb2b69fc8ac4abf"/>
+          <a:blip xmlns:r="http://schemas.openxmlformats.org/officeDocument/2006/relationships" xmlns:a="http://schemas.openxmlformats.org/drawingml/2006/main" r:embed="R7acc331292974487"/>
           <a:stretch xmlns:a="http://schemas.openxmlformats.org/drawingml/2006/main"/>
         </p:blipFill>
         <p:spPr>
@@ -11424,7 +11432,7 @@
           <p:cNvPr id="11" name="">
             <a:extLst xmlns:a="http://schemas.openxmlformats.org/drawingml/2006/main">
               <a:ext uri="{FF2B5EF4-FFF2-40B4-BE49-F238E27FC236}">
-                <a16:creationId xmlns:a16="http://schemas.microsoft.com/office/drawing/2014/main" id="{1A72966D-F525-4A12-B2F9-B1A3E09E4ABC}"/>
+                <a16:creationId xmlns:a16="http://schemas.microsoft.com/office/drawing/2014/main" id="{CE950809-040B-4963-AF96-47E89AE4C2B3}"/>
               </a:ext>
             </a:extLst>
           </p:cNvPr>
@@ -11481,7 +11489,7 @@
           <p:cNvPr id="12" name="">
             <a:extLst xmlns:a="http://schemas.openxmlformats.org/drawingml/2006/main">
               <a:ext uri="{FF2B5EF4-FFF2-40B4-BE49-F238E27FC236}">
-                <a16:creationId xmlns:a16="http://schemas.microsoft.com/office/drawing/2014/main" id="{D340CE26-66AA-4321-A60A-4DF5BD0885E5}"/>
+                <a16:creationId xmlns:a16="http://schemas.microsoft.com/office/drawing/2014/main" id="{D0BDCA20-7F07-4C8D-AC86-1A8CC45E0FC3}"/>
               </a:ext>
             </a:extLst>
           </p:cNvPr>
@@ -11538,7 +11546,7 @@
           <p:cNvPr id="13" name="">
             <a:extLst xmlns:a="http://schemas.openxmlformats.org/drawingml/2006/main">
               <a:ext uri="{FF2B5EF4-FFF2-40B4-BE49-F238E27FC236}">
-                <a16:creationId xmlns:a16="http://schemas.microsoft.com/office/drawing/2014/main" id="{7D196F55-46C1-4BD2-B343-1A6D2733A28A}"/>
+                <a16:creationId xmlns:a16="http://schemas.microsoft.com/office/drawing/2014/main" id="{9DA89CAE-D160-4910-A872-E7F3EDA00635}"/>
               </a:ext>
             </a:extLst>
           </p:cNvPr>
@@ -11570,7 +11578,7 @@
           <p:cNvPr id="14" name="">
             <a:extLst xmlns:a="http://schemas.openxmlformats.org/drawingml/2006/main">
               <a:ext uri="{FF2B5EF4-FFF2-40B4-BE49-F238E27FC236}">
-                <a16:creationId xmlns:a16="http://schemas.microsoft.com/office/drawing/2014/main" id="{FFEBE677-A3EF-4590-A819-5376C1C6765D}"/>
+                <a16:creationId xmlns:a16="http://schemas.microsoft.com/office/drawing/2014/main" id="{DEB1D485-D57E-463B-81CA-C55EF48F68B6}"/>
               </a:ext>
             </a:extLst>
           </p:cNvPr>
@@ -11627,7 +11635,7 @@
           <p:cNvPr id="15" name="">
             <a:extLst xmlns:a="http://schemas.openxmlformats.org/drawingml/2006/main">
               <a:ext uri="{FF2B5EF4-FFF2-40B4-BE49-F238E27FC236}">
-                <a16:creationId xmlns:a16="http://schemas.microsoft.com/office/drawing/2014/main" id="{0D130604-3DC6-435F-8BDA-F8F726272549}"/>
+                <a16:creationId xmlns:a16="http://schemas.microsoft.com/office/drawing/2014/main" id="{9468C6F7-F30D-4298-9328-8D83F95CD18E}"/>
               </a:ext>
             </a:extLst>
           </p:cNvPr>
@@ -11682,7 +11690,7 @@
     </p:spTree>
     <p:extLst>
       <p:ext uri="{BB962C8B-B14F-4D97-AF65-F5344CB8AC3E}">
-        <p14:creationId xmlns:p14="http://schemas.microsoft.com/office/powerpoint/2010/main" val="1424574681"/>
+        <p14:creationId xmlns:p14="http://schemas.microsoft.com/office/powerpoint/2010/main" val="1045842517"/>
       </p:ext>
     </p:extLst>
   </p:cSld>
@@ -11837,7 +11845,7 @@
           <p:cNvPr id="23" name="">
             <a:extLst xmlns:a="http://schemas.openxmlformats.org/drawingml/2006/main">
               <a:ext uri="{FF2B5EF4-FFF2-40B4-BE49-F238E27FC236}">
-                <a16:creationId xmlns:a16="http://schemas.microsoft.com/office/drawing/2014/main" id="{CBD1C0EC-C4B4-44D6-9313-C6158993E3BA}"/>
+                <a16:creationId xmlns:a16="http://schemas.microsoft.com/office/drawing/2014/main" id="{A4DF6F07-45B5-490A-8321-FCACCF7C5E9D}"/>
               </a:ext>
             </a:extLst>
           </p:cNvPr>
@@ -11869,7 +11877,7 @@
           <p:cNvPr id="2" name="">
             <a:extLst xmlns:a="http://schemas.openxmlformats.org/drawingml/2006/main">
               <a:ext uri="{FF2B5EF4-FFF2-40B4-BE49-F238E27FC236}">
-                <a16:creationId xmlns:a16="http://schemas.microsoft.com/office/drawing/2014/main" id="{EC91695E-3EBE-4EC3-AD4D-F81B1F1D20D3}"/>
+                <a16:creationId xmlns:a16="http://schemas.microsoft.com/office/drawing/2014/main" id="{46ABEB85-82EC-459A-B7A1-679CBB8B03F7}"/>
               </a:ext>
             </a:extLst>
           </p:cNvPr>
@@ -11926,7 +11934,7 @@
           <p:cNvPr id="3" name="">
             <a:extLst xmlns:a="http://schemas.openxmlformats.org/drawingml/2006/main">
               <a:ext uri="{FF2B5EF4-FFF2-40B4-BE49-F238E27FC236}">
-                <a16:creationId xmlns:a16="http://schemas.microsoft.com/office/drawing/2014/main" id="{F04B2E9B-3DED-4555-A0DB-14872DBC7775}"/>
+                <a16:creationId xmlns:a16="http://schemas.microsoft.com/office/drawing/2014/main" id="{24952A87-8692-4004-9F56-27D029619D7E}"/>
               </a:ext>
             </a:extLst>
           </p:cNvPr>
@@ -11958,7 +11966,7 @@
           <p:cNvPr id="4" name="">
             <a:extLst xmlns:a="http://schemas.openxmlformats.org/drawingml/2006/main">
               <a:ext uri="{FF2B5EF4-FFF2-40B4-BE49-F238E27FC236}">
-                <a16:creationId xmlns:a16="http://schemas.microsoft.com/office/drawing/2014/main" id="{23529AF3-CE7D-47D6-B826-703EC0243DF1}"/>
+                <a16:creationId xmlns:a16="http://schemas.microsoft.com/office/drawing/2014/main" id="{B8597B28-307A-4EBC-A54A-EC825EE31966}"/>
               </a:ext>
             </a:extLst>
           </p:cNvPr>
@@ -12015,7 +12023,7 @@
           <p:cNvPr id="5" name="">
             <a:extLst xmlns:a="http://schemas.openxmlformats.org/drawingml/2006/main">
               <a:ext uri="{FF2B5EF4-FFF2-40B4-BE49-F238E27FC236}">
-                <a16:creationId xmlns:a16="http://schemas.microsoft.com/office/drawing/2014/main" id="{07DEC4E5-0973-4A5F-80FB-7DAF43D28237}"/>
+                <a16:creationId xmlns:a16="http://schemas.microsoft.com/office/drawing/2014/main" id="{B227D03C-8DC2-431C-8854-37C00B79F226}"/>
               </a:ext>
             </a:extLst>
           </p:cNvPr>
@@ -12072,7 +12080,7 @@
           <p:cNvPr id="6" name="">
             <a:extLst xmlns:a="http://schemas.openxmlformats.org/drawingml/2006/main">
               <a:ext uri="{FF2B5EF4-FFF2-40B4-BE49-F238E27FC236}">
-                <a16:creationId xmlns:a16="http://schemas.microsoft.com/office/drawing/2014/main" id="{7E29EA05-7743-44FB-83BD-527095465C0F}"/>
+                <a16:creationId xmlns:a16="http://schemas.microsoft.com/office/drawing/2014/main" id="{D3328B20-A8DA-425D-92D9-93B2B54CE274}"/>
               </a:ext>
             </a:extLst>
           </p:cNvPr>
@@ -12129,7 +12137,7 @@
           <p:cNvPr id="7" name="">
             <a:extLst xmlns:a="http://schemas.openxmlformats.org/drawingml/2006/main">
               <a:ext uri="{FF2B5EF4-FFF2-40B4-BE49-F238E27FC236}">
-                <a16:creationId xmlns:a16="http://schemas.microsoft.com/office/drawing/2014/main" id="{4AE3A3A9-365C-4899-8D97-EBD574AA7457}"/>
+                <a16:creationId xmlns:a16="http://schemas.microsoft.com/office/drawing/2014/main" id="{38E6E903-B44C-41BD-9C52-EEFE5A8643B9}"/>
               </a:ext>
             </a:extLst>
           </p:cNvPr>
@@ -12161,7 +12169,7 @@
           <p:cNvPr id="8" name="">
             <a:extLst xmlns:a="http://schemas.openxmlformats.org/drawingml/2006/main">
               <a:ext uri="{FF2B5EF4-FFF2-40B4-BE49-F238E27FC236}">
-                <a16:creationId xmlns:a16="http://schemas.microsoft.com/office/drawing/2014/main" id="{D7C039C9-B5EA-4443-947E-5673CFC3ADE8}"/>
+                <a16:creationId xmlns:a16="http://schemas.microsoft.com/office/drawing/2014/main" id="{88DE329E-F9BB-4E40-AA58-32AA75E06262}"/>
               </a:ext>
             </a:extLst>
           </p:cNvPr>
@@ -12218,7 +12226,7 @@
           <p:cNvPr id="9" name="">
             <a:extLst xmlns:a="http://schemas.openxmlformats.org/drawingml/2006/main">
               <a:ext uri="{FF2B5EF4-FFF2-40B4-BE49-F238E27FC236}">
-                <a16:creationId xmlns:a16="http://schemas.microsoft.com/office/drawing/2014/main" id="{EA04E978-B75D-4090-9ED5-0E30084F028C}"/>
+                <a16:creationId xmlns:a16="http://schemas.microsoft.com/office/drawing/2014/main" id="{0B518DD9-C2E9-4775-8935-A0FBA23027EA}"/>
               </a:ext>
             </a:extLst>
           </p:cNvPr>
@@ -12275,7 +12283,7 @@
           <p:cNvPr id="10" name="">
             <a:extLst xmlns:a="http://schemas.openxmlformats.org/drawingml/2006/main">
               <a:ext uri="{FF2B5EF4-FFF2-40B4-BE49-F238E27FC236}">
-                <a16:creationId xmlns:a16="http://schemas.microsoft.com/office/drawing/2014/main" id="{3E7BF4FF-8567-4036-9CB0-940675C13FB0}"/>
+                <a16:creationId xmlns:a16="http://schemas.microsoft.com/office/drawing/2014/main" id="{48F4E016-2D5A-417A-8E49-3B2609983D92}"/>
               </a:ext>
             </a:extLst>
           </p:cNvPr>
@@ -12309,7 +12317,7 @@
           <p:cNvPr id="11" name="">
             <a:extLst xmlns:a="http://schemas.openxmlformats.org/drawingml/2006/main">
               <a:ext uri="{FF2B5EF4-FFF2-40B4-BE49-F238E27FC236}">
-                <a16:creationId xmlns:a16="http://schemas.microsoft.com/office/drawing/2014/main" id="{9FEDC45F-EFFE-42D9-A804-BC240F6CEB2F}"/>
+                <a16:creationId xmlns:a16="http://schemas.microsoft.com/office/drawing/2014/main" id="{80BE2D8B-03AD-4573-9C68-45C1201C8C39}"/>
               </a:ext>
             </a:extLst>
           </p:cNvPr>
@@ -12341,7 +12349,7 @@
           <p:cNvPr id="12" name="">
             <a:extLst xmlns:a="http://schemas.openxmlformats.org/drawingml/2006/main">
               <a:ext uri="{FF2B5EF4-FFF2-40B4-BE49-F238E27FC236}">
-                <a16:creationId xmlns:a16="http://schemas.microsoft.com/office/drawing/2014/main" id="{4D278D49-4949-4073-A5CA-66BDB58066AC}"/>
+                <a16:creationId xmlns:a16="http://schemas.microsoft.com/office/drawing/2014/main" id="{256502A4-9812-4AA0-A021-F3E5B073F425}"/>
               </a:ext>
             </a:extLst>
           </p:cNvPr>
@@ -12398,7 +12406,7 @@
           <p:cNvPr id="13" name="">
             <a:extLst xmlns:a="http://schemas.openxmlformats.org/drawingml/2006/main">
               <a:ext uri="{FF2B5EF4-FFF2-40B4-BE49-F238E27FC236}">
-                <a16:creationId xmlns:a16="http://schemas.microsoft.com/office/drawing/2014/main" id="{CE91CDE9-BAD5-4409-BE0C-F02CB110FB01}"/>
+                <a16:creationId xmlns:a16="http://schemas.microsoft.com/office/drawing/2014/main" id="{B514E8D2-87D7-4175-A51B-24B799FE2B5A}"/>
               </a:ext>
             </a:extLst>
           </p:cNvPr>
@@ -12455,7 +12463,7 @@
           <p:cNvPr id="14" name="">
             <a:extLst xmlns:a="http://schemas.openxmlformats.org/drawingml/2006/main">
               <a:ext uri="{FF2B5EF4-FFF2-40B4-BE49-F238E27FC236}">
-                <a16:creationId xmlns:a16="http://schemas.microsoft.com/office/drawing/2014/main" id="{CB899FA4-1D12-4569-A0BB-0918812EC66C}"/>
+                <a16:creationId xmlns:a16="http://schemas.microsoft.com/office/drawing/2014/main" id="{2F12D6AB-CAB7-43B2-9EDB-238DAB506149}"/>
               </a:ext>
             </a:extLst>
           </p:cNvPr>
@@ -12489,7 +12497,7 @@
           <p:cNvPr id="15" name="">
             <a:extLst xmlns:a="http://schemas.openxmlformats.org/drawingml/2006/main">
               <a:ext uri="{FF2B5EF4-FFF2-40B4-BE49-F238E27FC236}">
-                <a16:creationId xmlns:a16="http://schemas.microsoft.com/office/drawing/2014/main" id="{D918A95D-DCBB-4D60-8355-D0DD766959FE}"/>
+                <a16:creationId xmlns:a16="http://schemas.microsoft.com/office/drawing/2014/main" id="{E604B0F9-65C5-4B54-9193-C5C9BBC99E05}"/>
               </a:ext>
             </a:extLst>
           </p:cNvPr>
@@ -12521,7 +12529,7 @@
           <p:cNvPr id="16" name="">
             <a:extLst xmlns:a="http://schemas.openxmlformats.org/drawingml/2006/main">
               <a:ext uri="{FF2B5EF4-FFF2-40B4-BE49-F238E27FC236}">
-                <a16:creationId xmlns:a16="http://schemas.microsoft.com/office/drawing/2014/main" id="{FD7611C7-49AA-434A-9A9D-430F1FF83256}"/>
+                <a16:creationId xmlns:a16="http://schemas.microsoft.com/office/drawing/2014/main" id="{0A8CC737-ED77-4C85-9D10-E6DC3F2673CC}"/>
               </a:ext>
             </a:extLst>
           </p:cNvPr>
@@ -12578,7 +12586,7 @@
           <p:cNvPr id="17" name="">
             <a:extLst xmlns:a="http://schemas.openxmlformats.org/drawingml/2006/main">
               <a:ext uri="{FF2B5EF4-FFF2-40B4-BE49-F238E27FC236}">
-                <a16:creationId xmlns:a16="http://schemas.microsoft.com/office/drawing/2014/main" id="{0F684F30-9362-47D1-93E5-E86DD5DD5080}"/>
+                <a16:creationId xmlns:a16="http://schemas.microsoft.com/office/drawing/2014/main" id="{551911BC-C853-4517-85EC-D613287DFCFD}"/>
               </a:ext>
             </a:extLst>
           </p:cNvPr>
@@ -12635,7 +12643,7 @@
           <p:cNvPr id="18" name="">
             <a:extLst xmlns:a="http://schemas.openxmlformats.org/drawingml/2006/main">
               <a:ext uri="{FF2B5EF4-FFF2-40B4-BE49-F238E27FC236}">
-                <a16:creationId xmlns:a16="http://schemas.microsoft.com/office/drawing/2014/main" id="{0B6871EB-F3D4-4337-8F18-9A10873F37C3}"/>
+                <a16:creationId xmlns:a16="http://schemas.microsoft.com/office/drawing/2014/main" id="{426E1CE6-ED24-4659-ACCD-20E1C5A24318}"/>
               </a:ext>
             </a:extLst>
           </p:cNvPr>
@@ -12669,7 +12677,7 @@
           <p:cNvPr id="19" name="">
             <a:extLst xmlns:a="http://schemas.openxmlformats.org/drawingml/2006/main">
               <a:ext uri="{FF2B5EF4-FFF2-40B4-BE49-F238E27FC236}">
-                <a16:creationId xmlns:a16="http://schemas.microsoft.com/office/drawing/2014/main" id="{0B40C75B-D3E7-4771-8871-9AC3C4D40625}"/>
+                <a16:creationId xmlns:a16="http://schemas.microsoft.com/office/drawing/2014/main" id="{0755C630-0E07-4E5B-9FC6-43B59DF327AD}"/>
               </a:ext>
             </a:extLst>
           </p:cNvPr>
@@ -12701,7 +12709,7 @@
           <p:cNvPr id="20" name="">
             <a:extLst xmlns:a="http://schemas.openxmlformats.org/drawingml/2006/main">
               <a:ext uri="{FF2B5EF4-FFF2-40B4-BE49-F238E27FC236}">
-                <a16:creationId xmlns:a16="http://schemas.microsoft.com/office/drawing/2014/main" id="{38E37C96-E161-4EC1-AC4B-295E41EBFF4B}"/>
+                <a16:creationId xmlns:a16="http://schemas.microsoft.com/office/drawing/2014/main" id="{6636181E-E890-43AF-8C52-446D47D9F706}"/>
               </a:ext>
             </a:extLst>
           </p:cNvPr>
@@ -12758,7 +12766,7 @@
           <p:cNvPr id="21" name="">
             <a:extLst xmlns:a="http://schemas.openxmlformats.org/drawingml/2006/main">
               <a:ext uri="{FF2B5EF4-FFF2-40B4-BE49-F238E27FC236}">
-                <a16:creationId xmlns:a16="http://schemas.microsoft.com/office/drawing/2014/main" id="{C729C7D1-24A1-4397-AE64-E5CDD228118F}"/>
+                <a16:creationId xmlns:a16="http://schemas.microsoft.com/office/drawing/2014/main" id="{18C68CD8-8375-49D4-B13A-8890B600699C}"/>
               </a:ext>
             </a:extLst>
           </p:cNvPr>
@@ -12815,7 +12823,7 @@
           <p:cNvPr id="22" name="">
             <a:extLst xmlns:a="http://schemas.openxmlformats.org/drawingml/2006/main">
               <a:ext uri="{FF2B5EF4-FFF2-40B4-BE49-F238E27FC236}">
-                <a16:creationId xmlns:a16="http://schemas.microsoft.com/office/drawing/2014/main" id="{0F996DE0-BAF9-409B-82A3-A7C2FCEA32AD}"/>
+                <a16:creationId xmlns:a16="http://schemas.microsoft.com/office/drawing/2014/main" id="{E3AE7D96-1F3C-4F82-9C41-6C607A2FD2C4}"/>
               </a:ext>
             </a:extLst>
           </p:cNvPr>
@@ -12870,7 +12878,7 @@
     </p:spTree>
     <p:extLst>
       <p:ext uri="{BB962C8B-B14F-4D97-AF65-F5344CB8AC3E}">
-        <p14:creationId xmlns:p14="http://schemas.microsoft.com/office/powerpoint/2010/main" val="1872338290"/>
+        <p14:creationId xmlns:p14="http://schemas.microsoft.com/office/powerpoint/2010/main" val="989674151"/>
       </p:ext>
     </p:extLst>
   </p:cSld>
@@ -13071,7 +13079,7 @@
           <p:cNvPr id="22" name="">
             <a:extLst xmlns:a="http://schemas.openxmlformats.org/drawingml/2006/main">
               <a:ext uri="{FF2B5EF4-FFF2-40B4-BE49-F238E27FC236}">
-                <a16:creationId xmlns:a16="http://schemas.microsoft.com/office/drawing/2014/main" id="{BD062F55-490D-476D-8A49-B1F6A60BC233}"/>
+                <a16:creationId xmlns:a16="http://schemas.microsoft.com/office/drawing/2014/main" id="{6EC8BE6E-366E-4BE6-8B59-A562D494119C}"/>
               </a:ext>
             </a:extLst>
           </p:cNvPr>
@@ -13103,7 +13111,7 @@
           <p:cNvPr id="2" name="">
             <a:extLst xmlns:a="http://schemas.openxmlformats.org/drawingml/2006/main">
               <a:ext uri="{FF2B5EF4-FFF2-40B4-BE49-F238E27FC236}">
-                <a16:creationId xmlns:a16="http://schemas.microsoft.com/office/drawing/2014/main" id="{B59C099C-3B9E-4220-8B11-EC94D6D87FC8}"/>
+                <a16:creationId xmlns:a16="http://schemas.microsoft.com/office/drawing/2014/main" id="{0CAEA85D-F203-4509-A1C4-EC6AFF8FAB32}"/>
               </a:ext>
             </a:extLst>
           </p:cNvPr>
@@ -13160,7 +13168,7 @@
           <p:cNvPr id="3" name="">
             <a:extLst xmlns:a="http://schemas.openxmlformats.org/drawingml/2006/main">
               <a:ext uri="{FF2B5EF4-FFF2-40B4-BE49-F238E27FC236}">
-                <a16:creationId xmlns:a16="http://schemas.microsoft.com/office/drawing/2014/main" id="{7D319784-E281-4D5E-83BF-8DA901A8A906}"/>
+                <a16:creationId xmlns:a16="http://schemas.microsoft.com/office/drawing/2014/main" id="{A20269A8-69C0-4312-9B58-5A87AF310388}"/>
               </a:ext>
             </a:extLst>
           </p:cNvPr>
@@ -13192,7 +13200,7 @@
           <p:cNvPr id="4" name="">
             <a:extLst xmlns:a="http://schemas.openxmlformats.org/drawingml/2006/main">
               <a:ext uri="{FF2B5EF4-FFF2-40B4-BE49-F238E27FC236}">
-                <a16:creationId xmlns:a16="http://schemas.microsoft.com/office/drawing/2014/main" id="{34AD622B-BA9E-4176-AB44-0789D9BE8B42}"/>
+                <a16:creationId xmlns:a16="http://schemas.microsoft.com/office/drawing/2014/main" id="{7784C7B6-F18E-45A4-BCB8-E3BEFD52539F}"/>
               </a:ext>
             </a:extLst>
           </p:cNvPr>
@@ -13249,7 +13257,7 @@
           <p:cNvPr id="5" name="">
             <a:extLst xmlns:a="http://schemas.openxmlformats.org/drawingml/2006/main">
               <a:ext uri="{FF2B5EF4-FFF2-40B4-BE49-F238E27FC236}">
-                <a16:creationId xmlns:a16="http://schemas.microsoft.com/office/drawing/2014/main" id="{C2CE15AB-E940-4D47-9A8C-85B2BD22D9BC}"/>
+                <a16:creationId xmlns:a16="http://schemas.microsoft.com/office/drawing/2014/main" id="{AC03B24A-6BEB-4832-AF8E-021B241107EC}"/>
               </a:ext>
             </a:extLst>
           </p:cNvPr>
@@ -13306,7 +13314,7 @@
           <p:cNvPr id="6" name="">
             <a:extLst xmlns:a="http://schemas.openxmlformats.org/drawingml/2006/main">
               <a:ext uri="{FF2B5EF4-FFF2-40B4-BE49-F238E27FC236}">
-                <a16:creationId xmlns:a16="http://schemas.microsoft.com/office/drawing/2014/main" id="{03986055-5A06-4863-91E6-050396EAFE08}"/>
+                <a16:creationId xmlns:a16="http://schemas.microsoft.com/office/drawing/2014/main" id="{7E4F461D-B2CC-4986-94B3-A40B2289FC8A}"/>
               </a:ext>
             </a:extLst>
           </p:cNvPr>
@@ -13363,7 +13371,7 @@
           <p:cNvPr id="7" name="">
             <a:extLst xmlns:a="http://schemas.openxmlformats.org/drawingml/2006/main">
               <a:ext uri="{FF2B5EF4-FFF2-40B4-BE49-F238E27FC236}">
-                <a16:creationId xmlns:a16="http://schemas.microsoft.com/office/drawing/2014/main" id="{2C267972-D83C-408C-96DF-CBB43762B9B9}"/>
+                <a16:creationId xmlns:a16="http://schemas.microsoft.com/office/drawing/2014/main" id="{BB478D8D-070F-44F8-B3A4-EE196474F92E}"/>
               </a:ext>
             </a:extLst>
           </p:cNvPr>
@@ -13395,7 +13403,7 @@
           <p:cNvPr id="8" name="">
             <a:extLst xmlns:a="http://schemas.openxmlformats.org/drawingml/2006/main">
               <a:ext uri="{FF2B5EF4-FFF2-40B4-BE49-F238E27FC236}">
-                <a16:creationId xmlns:a16="http://schemas.microsoft.com/office/drawing/2014/main" id="{01A58C9E-ED75-42ED-9F23-9DCF2DB8C503}"/>
+                <a16:creationId xmlns:a16="http://schemas.microsoft.com/office/drawing/2014/main" id="{CF49D537-ABE5-4E2A-A2C2-A944F61394C2}"/>
               </a:ext>
             </a:extLst>
           </p:cNvPr>
@@ -13452,7 +13460,7 @@
           <p:cNvPr id="9" name="">
             <a:extLst xmlns:a="http://schemas.openxmlformats.org/drawingml/2006/main">
               <a:ext uri="{FF2B5EF4-FFF2-40B4-BE49-F238E27FC236}">
-                <a16:creationId xmlns:a16="http://schemas.microsoft.com/office/drawing/2014/main" id="{EBFFFE66-B545-4CF6-ADD6-3EB88C9483D4}"/>
+                <a16:creationId xmlns:a16="http://schemas.microsoft.com/office/drawing/2014/main" id="{BACA6C1B-0F3C-4DF1-8E08-A97F55FB0384}"/>
               </a:ext>
             </a:extLst>
           </p:cNvPr>
@@ -13509,7 +13517,7 @@
           <p:cNvPr id="10" name="">
             <a:extLst xmlns:a="http://schemas.openxmlformats.org/drawingml/2006/main">
               <a:ext uri="{FF2B5EF4-FFF2-40B4-BE49-F238E27FC236}">
-                <a16:creationId xmlns:a16="http://schemas.microsoft.com/office/drawing/2014/main" id="{441EC278-4357-406F-8A50-1EA9C6023248}"/>
+                <a16:creationId xmlns:a16="http://schemas.microsoft.com/office/drawing/2014/main" id="{691DC741-7F2C-4083-B213-1AF755A20DF1}"/>
               </a:ext>
             </a:extLst>
           </p:cNvPr>
@@ -13543,7 +13551,7 @@
           <p:cNvPr id="11" name="">
             <a:extLst xmlns:a="http://schemas.openxmlformats.org/drawingml/2006/main">
               <a:ext uri="{FF2B5EF4-FFF2-40B4-BE49-F238E27FC236}">
-                <a16:creationId xmlns:a16="http://schemas.microsoft.com/office/drawing/2014/main" id="{8296A75E-E62E-4B0A-A6E1-5496D18409BD}"/>
+                <a16:creationId xmlns:a16="http://schemas.microsoft.com/office/drawing/2014/main" id="{D97F649C-6006-46D4-AE1B-43B4550C4187}"/>
               </a:ext>
             </a:extLst>
           </p:cNvPr>
@@ -13575,7 +13583,7 @@
           <p:cNvPr id="12" name="">
             <a:extLst xmlns:a="http://schemas.openxmlformats.org/drawingml/2006/main">
               <a:ext uri="{FF2B5EF4-FFF2-40B4-BE49-F238E27FC236}">
-                <a16:creationId xmlns:a16="http://schemas.microsoft.com/office/drawing/2014/main" id="{D5693F2E-D672-4833-81FC-5F0E3E57AA62}"/>
+                <a16:creationId xmlns:a16="http://schemas.microsoft.com/office/drawing/2014/main" id="{72222BBE-F8CB-481D-8F70-1DA17333F70C}"/>
               </a:ext>
             </a:extLst>
           </p:cNvPr>
@@ -13632,7 +13640,7 @@
           <p:cNvPr id="13" name="">
             <a:extLst xmlns:a="http://schemas.openxmlformats.org/drawingml/2006/main">
               <a:ext uri="{FF2B5EF4-FFF2-40B4-BE49-F238E27FC236}">
-                <a16:creationId xmlns:a16="http://schemas.microsoft.com/office/drawing/2014/main" id="{A31C0763-3B20-4ED8-B296-30291F48FC31}"/>
+                <a16:creationId xmlns:a16="http://schemas.microsoft.com/office/drawing/2014/main" id="{9E7D6822-719F-4BAC-95A3-E0B38870026F}"/>
               </a:ext>
             </a:extLst>
           </p:cNvPr>
@@ -13689,7 +13697,7 @@
           <p:cNvPr id="14" name="">
             <a:extLst xmlns:a="http://schemas.openxmlformats.org/drawingml/2006/main">
               <a:ext uri="{FF2B5EF4-FFF2-40B4-BE49-F238E27FC236}">
-                <a16:creationId xmlns:a16="http://schemas.microsoft.com/office/drawing/2014/main" id="{76BF7926-E4E2-4FED-BCE4-A53F42B3FFE4}"/>
+                <a16:creationId xmlns:a16="http://schemas.microsoft.com/office/drawing/2014/main" id="{C730B164-2F7B-4135-8C2F-9078C1A4248D}"/>
               </a:ext>
             </a:extLst>
           </p:cNvPr>
@@ -13723,7 +13731,7 @@
           <p:cNvPr id="15" name="">
             <a:extLst xmlns:a="http://schemas.openxmlformats.org/drawingml/2006/main">
               <a:ext uri="{FF2B5EF4-FFF2-40B4-BE49-F238E27FC236}">
-                <a16:creationId xmlns:a16="http://schemas.microsoft.com/office/drawing/2014/main" id="{F3CF091E-4050-44AD-B16A-5600F5BBF086}"/>
+                <a16:creationId xmlns:a16="http://schemas.microsoft.com/office/drawing/2014/main" id="{8AD491FF-FE6E-4CC1-AC23-42777882872E}"/>
               </a:ext>
             </a:extLst>
           </p:cNvPr>
@@ -13755,7 +13763,7 @@
           <p:cNvPr id="16" name="">
             <a:extLst xmlns:a="http://schemas.openxmlformats.org/drawingml/2006/main">
               <a:ext uri="{FF2B5EF4-FFF2-40B4-BE49-F238E27FC236}">
-                <a16:creationId xmlns:a16="http://schemas.microsoft.com/office/drawing/2014/main" id="{2005032C-A300-48DA-BC83-220662F68FF8}"/>
+                <a16:creationId xmlns:a16="http://schemas.microsoft.com/office/drawing/2014/main" id="{BBCE0B37-7563-47C6-BE32-13C9416A7DA8}"/>
               </a:ext>
             </a:extLst>
           </p:cNvPr>
@@ -13812,7 +13820,7 @@
           <p:cNvPr id="17" name="">
             <a:extLst xmlns:a="http://schemas.openxmlformats.org/drawingml/2006/main">
               <a:ext uri="{FF2B5EF4-FFF2-40B4-BE49-F238E27FC236}">
-                <a16:creationId xmlns:a16="http://schemas.microsoft.com/office/drawing/2014/main" id="{B2D31C94-C92D-4852-83A8-F01EA850D745}"/>
+                <a16:creationId xmlns:a16="http://schemas.microsoft.com/office/drawing/2014/main" id="{471B50A8-09B8-4122-81AB-4E557E7EC7E8}"/>
               </a:ext>
             </a:extLst>
           </p:cNvPr>
@@ -13869,7 +13877,7 @@
           <p:cNvPr id="18" name="">
             <a:extLst xmlns:a="http://schemas.openxmlformats.org/drawingml/2006/main">
               <a:ext uri="{FF2B5EF4-FFF2-40B4-BE49-F238E27FC236}">
-                <a16:creationId xmlns:a16="http://schemas.microsoft.com/office/drawing/2014/main" id="{1A21604E-7013-49F6-BD41-3DDEF3197432}"/>
+                <a16:creationId xmlns:a16="http://schemas.microsoft.com/office/drawing/2014/main" id="{1F242EB5-286E-4DEF-8A4E-EBB0AAD9E09A}"/>
               </a:ext>
             </a:extLst>
           </p:cNvPr>
@@ -13903,7 +13911,7 @@
           <p:cNvPr id="19" name="">
             <a:extLst xmlns:a="http://schemas.openxmlformats.org/drawingml/2006/main">
               <a:ext uri="{FF2B5EF4-FFF2-40B4-BE49-F238E27FC236}">
-                <a16:creationId xmlns:a16="http://schemas.microsoft.com/office/drawing/2014/main" id="{6CA2E2A0-1C23-468A-B4B4-A988A9B3E477}"/>
+                <a16:creationId xmlns:a16="http://schemas.microsoft.com/office/drawing/2014/main" id="{C8FFBAB7-6BB3-4416-85C6-CD94EF48EF88}"/>
               </a:ext>
             </a:extLst>
           </p:cNvPr>
@@ -13935,7 +13943,7 @@
           <p:cNvPr id="20" name="">
             <a:extLst xmlns:a="http://schemas.openxmlformats.org/drawingml/2006/main">
               <a:ext uri="{FF2B5EF4-FFF2-40B4-BE49-F238E27FC236}">
-                <a16:creationId xmlns:a16="http://schemas.microsoft.com/office/drawing/2014/main" id="{11612773-1DE4-4CCC-9F3D-5AB4B8DEA5F0}"/>
+                <a16:creationId xmlns:a16="http://schemas.microsoft.com/office/drawing/2014/main" id="{3907E2C6-0408-41F4-87CF-81994FEADB79}"/>
               </a:ext>
             </a:extLst>
           </p:cNvPr>
@@ -13992,7 +14000,7 @@
           <p:cNvPr id="21" name="">
             <a:extLst xmlns:a="http://schemas.openxmlformats.org/drawingml/2006/main">
               <a:ext uri="{FF2B5EF4-FFF2-40B4-BE49-F238E27FC236}">
-                <a16:creationId xmlns:a16="http://schemas.microsoft.com/office/drawing/2014/main" id="{ACFDC4E1-5A2F-4A67-A136-E3D2EE7F0A0D}"/>
+                <a16:creationId xmlns:a16="http://schemas.microsoft.com/office/drawing/2014/main" id="{CF4376EA-09C9-481B-B1F2-D98AA2F8D4E0}"/>
               </a:ext>
             </a:extLst>
           </p:cNvPr>
@@ -14047,7 +14055,7 @@
     </p:spTree>
     <p:extLst>
       <p:ext uri="{BB962C8B-B14F-4D97-AF65-F5344CB8AC3E}">
-        <p14:creationId xmlns:p14="http://schemas.microsoft.com/office/powerpoint/2010/main" val="256411075"/>
+        <p14:creationId xmlns:p14="http://schemas.microsoft.com/office/powerpoint/2010/main" val="673679061"/>
       </p:ext>
     </p:extLst>
   </p:cSld>
